--- a/protected-downloads/praesentation/TL03.pptx
+++ b/protected-downloads/praesentation/TL03.pptx
@@ -5084,7 +5084,7 @@
                 </a:solidFill>
                 <a:latin typeface="Arial"/>
               </a:rPr>
-              <a:t>v0.2</a:t>
+              <a:t>v1.0</a:t>
             </a:r>
           </a:p>
         </p:txBody>

--- a/protected-downloads/praesentation/TL03.pptx
+++ b/protected-downloads/praesentation/TL03.pptx
@@ -5084,7 +5084,7 @@
                 </a:solidFill>
                 <a:latin typeface="Arial"/>
               </a:rPr>
-              <a:t>v1.0</a:t>
+              <a:t>v1.1</a:t>
             </a:r>
           </a:p>
         </p:txBody>

--- a/protected-downloads/praesentation/TL03.pptx
+++ b/protected-downloads/praesentation/TL03.pptx
@@ -28,6 +28,8 @@
     <p:sldId id="276" r:id="rId28"/>
     <p:sldId id="277" r:id="rId29"/>
     <p:sldId id="278" r:id="rId30"/>
+    <p:sldId id="279" r:id="rId31"/>
+    <p:sldId id="280" r:id="rId32"/>
   </p:sldIdLst>
   <p:sldSz cx="12188952" cy="6858000" type="screen4x3"/>
   <p:notesSz cx="6858000" cy="9144000"/>
@@ -594,7 +596,17 @@
           <a:lstStyle/>
           <a:p>
             <a:r>
-              <a:t>Siehe Trainerhandbuch (Sektion 3) für Moderationshinweise, Timing und erwartete Teilnehmerreaktionen.</a:t>
+              <a:t>Tuckman (1965) + Tuckman &amp; Jensen (1977): Adjourning bei Umstrukturierungen kurz nennen.</a:t>
+            </a:r>
+          </a:p>
+          <a:p>
+            <a:r>
+              <a:t>Häufigster Fehler in Storming: Führungskraft dämpft Konflikte statt sie zu moderieren.</a:t>
+            </a:r>
+          </a:p>
+          <a:p>
+            <a:r>
+              <a:t>Stärkste Lernfrage: „Was tue ich gerade, das möglicherweise NICHT zur Phase passt?“</a:t>
             </a:r>
           </a:p>
         </p:txBody>
@@ -664,17 +676,22 @@
           <a:lstStyle/>
           <a:p>
             <a:r>
-              <a:t>Tuckman (1965) + Tuckman &amp; Jensen (1977): Adjourning bei Umstrukturierungen kurz nennen.</a:t>
-            </a:r>
-          </a:p>
-          <a:p>
-            <a:r>
-              <a:t>Häufigster Fehler in Storming: Führungskraft dämpft Konflikte statt sie zu moderieren.</a:t>
-            </a:r>
-          </a:p>
-          <a:p>
-            <a:r>
-              <a:t>Stärkste Lernfrage: „Was tue ich gerade, das möglicherweise NICHT zur Phase passt?“</a:t>
+              <a:t>Mindestens 12 Min. Schreibzeit ohne Unterbrechung geben.</a:t>
+            </a:r>
+          </a:p>
+          <a:p>
+            <a:r>
+              <a:t>Hilfsformulierung bei Unsicherheit: „Ihr bestes Bild aus den letzten vier Wochen reicht.“</a:t>
+            </a:r>
+          </a:p>
+          <a:p>
+            <a:r>
+              <a:t>Stärkste Lernfrage Schritt 3 im Plenum aktiv einfordern – kurze Stille nach dem Ausfüllen zulassen.</a:t>
+            </a:r>
+          </a:p>
+          <a:p>
+            <a:r>
+              <a:t>Zwei bis drei TN teilen ihre Phasen-Einschätzung, Plenum reagiert mit Beobachtungen.</a:t>
             </a:r>
           </a:p>
         </p:txBody>
@@ -744,22 +761,27 @@
           <a:lstStyle/>
           <a:p>
             <a:r>
-              <a:t>Mindestens 12 Min. Schreibzeit ohne Unterbrechung geben.</a:t>
-            </a:r>
-          </a:p>
-          <a:p>
-            <a:r>
-              <a:t>Hilfsformulierung bei Unsicherheit: „Ihr bestes Bild aus den letzten vier Wochen reicht.“</a:t>
-            </a:r>
-          </a:p>
-          <a:p>
-            <a:r>
-              <a:t>Stärkste Lernfrage Schritt 3 im Plenum aktiv einfordern – kurze Stille nach dem Ausfüllen zulassen.</a:t>
-            </a:r>
-          </a:p>
-          <a:p>
-            <a:r>
-              <a:t>Zwei bis drei TN teilen ihre Phasen-Einschätzung, Plenum reagiert mit Beobachtungen.</a:t>
+              <a:t>Kerntransfer: Hier wird formuliert, nicht analysiert – das ist der Unterschied zur Fallberatung.</a:t>
+            </a:r>
+          </a:p>
+          <a:p>
+            <a:r>
+              <a:t>Pflichtkomponente explizit machen: Die Entwicklungsabsicht muss ausgesprochen werden.</a:t>
+            </a:r>
+          </a:p>
+          <a:p>
+            <a:r>
+              <a:t>Sprachcheck: Zwei TN lesen Schritte 2+3 laut vor. Plenum nimmt Mitarbeitenden-Perspektive ein.</a:t>
+            </a:r>
+          </a:p>
+          <a:p>
+            <a:r>
+              <a:t>Zwei Fokus-Fragen fürs Plenum: „Verstehe ich, was erwartet wird?“ + „Spüre ich, dass die FK mir etwas zutraut?“</a:t>
+            </a:r>
+          </a:p>
+          <a:p>
+            <a:r>
+              <a:t>Kein Rollenspiel – Textarbeit, Formulierung schärfen, Feedback zu Klarheit und Einladungscharakter.</a:t>
             </a:r>
           </a:p>
         </p:txBody>
@@ -829,27 +851,17 @@
           <a:lstStyle/>
           <a:p>
             <a:r>
-              <a:t>Kerntransfer: Hier wird formuliert, nicht analysiert – das ist der Unterschied zur Fallberatung.</a:t>
-            </a:r>
-          </a:p>
-          <a:p>
-            <a:r>
-              <a:t>Pflichtkomponente explizit machen: Die Entwicklungsabsicht muss ausgesprochen werden.</a:t>
-            </a:r>
-          </a:p>
-          <a:p>
-            <a:r>
-              <a:t>Sprachcheck: Zwei TN lesen Schritte 2+3 laut vor. Plenum nimmt Mitarbeitenden-Perspektive ein.</a:t>
-            </a:r>
-          </a:p>
-          <a:p>
-            <a:r>
-              <a:t>Zwei Fokus-Fragen fürs Plenum: „Verstehe ich, was erwartet wird?“ + „Spüre ich, dass die FK mir etwas zutraut?“</a:t>
-            </a:r>
-          </a:p>
-          <a:p>
-            <a:r>
-              <a:t>Kein Rollenspiel – Textarbeit, Formulierung schärfen, Feedback zu Klarheit und Einladungscharakter.</a:t>
+              <a:t>TN formulieren still ihren ersten Schritt für nächste Woche.</a:t>
+            </a:r>
+          </a:p>
+          <a:p>
+            <a:r>
+              <a:t>Selbstcheck (Sec 5) mitgeben – TN markieren heute: Welche Frage würde ich schon mit 3+ beantworten?</a:t>
+            </a:r>
+          </a:p>
+          <a:p>
+            <a:r>
+              <a:t>L3-Beobachtungsgespräch mit Bereichsleitung verbindlich terminieren (4–8 Wochen nach Workshop).</a:t>
             </a:r>
           </a:p>
         </p:txBody>
@@ -919,86 +931,6 @@
           <a:lstStyle/>
           <a:p>
             <a:r>
-              <a:t>TN formulieren still ihren ersten Schritt für nächste Woche.</a:t>
-            </a:r>
-          </a:p>
-          <a:p>
-            <a:r>
-              <a:t>Selbstcheck (Sec 5) mitgeben – TN markieren heute: Welche Frage würde ich schon mit 3+ beantworten?</a:t>
-            </a:r>
-          </a:p>
-          <a:p>
-            <a:r>
-              <a:t>L3-Beobachtungsgespräch mit Bereichsleitung verbindlich terminieren (4–8 Wochen nach Workshop).</a:t>
-            </a:r>
-          </a:p>
-        </p:txBody>
-      </p:sp>
-      <p:sp>
-        <p:nvSpPr>
-          <p:cNvPr id="4" name="Slide Number Placeholder 3"/>
-          <p:cNvSpPr>
-            <a:spLocks noGrp="1"/>
-          </p:cNvSpPr>
-          <p:nvPr>
-            <p:ph type="sldNum" idx="5" sz="quarter"/>
-          </p:nvPr>
-        </p:nvSpPr>
-        <p:spPr/>
-      </p:sp>
-    </p:spTree>
-  </p:cSld>
-  <p:clrMapOvr>
-    <a:masterClrMapping/>
-  </p:clrMapOvr>
-</p:notes>
-</file>
-
-<file path=ppt/notesSlides/notesSlide15.xml><?xml version="1.0" encoding="utf-8"?>
-<p:notes xmlns:a="http://schemas.openxmlformats.org/drawingml/2006/main" xmlns:p="http://schemas.openxmlformats.org/presentationml/2006/main" xmlns:r="http://schemas.openxmlformats.org/officeDocument/2006/relationships">
-  <p:cSld>
-    <p:spTree>
-      <p:nvGrpSpPr>
-        <p:cNvPr id="1" name=""/>
-        <p:cNvGrpSpPr/>
-        <p:nvPr/>
-      </p:nvGrpSpPr>
-      <p:grpSpPr>
-        <a:xfrm>
-          <a:off x="0" y="0"/>
-          <a:ext cx="0" cy="0"/>
-          <a:chOff x="0" y="0"/>
-          <a:chExt cx="0" cy="0"/>
-        </a:xfrm>
-      </p:grpSpPr>
-      <p:sp>
-        <p:nvSpPr>
-          <p:cNvPr id="2" name="Slide Image Placeholder 1"/>
-          <p:cNvSpPr>
-            <a:spLocks noGrp="1"/>
-          </p:cNvSpPr>
-          <p:nvPr>
-            <p:ph type="sldImg" idx="2"/>
-          </p:nvPr>
-        </p:nvSpPr>
-        <p:spPr/>
-      </p:sp>
-      <p:sp>
-        <p:nvSpPr>
-          <p:cNvPr id="3" name="Notes Placeholder 2"/>
-          <p:cNvSpPr>
-            <a:spLocks noGrp="1"/>
-          </p:cNvSpPr>
-          <p:nvPr>
-            <p:ph type="body" idx="3" sz="quarter"/>
-          </p:nvPr>
-        </p:nvSpPr>
-        <p:spPr/>
-        <p:txBody>
-          <a:bodyPr/>
-          <a:lstStyle/>
-          <a:p>
-            <a:r>
               <a:t>Greenleaf (1977): Servant Leadership als Haltung, nicht als Technik.</a:t>
             </a:r>
           </a:p>
@@ -1079,7 +1011,17 @@
           <a:lstStyle/>
           <a:p>
             <a:r>
-              <a:t>Siehe Trainerhandbuch (Sektion 3) für Moderationshinweise, Timing und erwartete Teilnehmerreaktionen.</a:t>
+              <a:t>Einstieg: Blitzlicht-Runde vorher schon abgeschlossen. Nennungen am Flipchart sichtbar.</a:t>
+            </a:r>
+          </a:p>
+          <a:p>
+            <a:r>
+              <a:t>Verbindung TL02 explizit herstellen: Reifegrad (D1–D4) gibt die Richtung, Delegationsgrad gibt die Entscheidung.</a:t>
+            </a:r>
+          </a:p>
+          <a:p>
+            <a:r>
+              <a:t>Faustregel nennen: D1 → Grad 1–2; D2 → Grad 2–3; D3/D4 → Grad 3–4.</a:t>
             </a:r>
           </a:p>
         </p:txBody>
@@ -1149,17 +1091,17 @@
           <a:lstStyle/>
           <a:p>
             <a:r>
-              <a:t>Einstieg: Blitzlicht-Runde vorher schon abgeschlossen. Nennungen am Flipchart sichtbar.</a:t>
-            </a:r>
-          </a:p>
-          <a:p>
-            <a:r>
-              <a:t>Verbindung TL02 explizit herstellen: Reifegrad (D1–D4) gibt die Richtung, Delegationsgrad gibt die Entscheidung.</a:t>
-            </a:r>
-          </a:p>
-          <a:p>
-            <a:r>
-              <a:t>Faustregel nennen: D1 → Grad 1–2; D2 → Grad 2–3; D3/D4 → Grad 3–4.</a:t>
+              <a:t>Kernbotschaft: Kein Grad ist pauschal besser – Passgenauigkeit entscheidet.</a:t>
+            </a:r>
+          </a:p>
+          <a:p>
+            <a:r>
+              <a:t>FK, die grundsätzlich auf Grad 1 verbleibt, verhindert aktiv Teamentwicklung.</a:t>
+            </a:r>
+          </a:p>
+          <a:p>
+            <a:r>
+              <a:t>Praxisbeispiel: D3-Berater + Standardkundentermin = Grad 3/4, nicht Grad 1.</a:t>
             </a:r>
           </a:p>
         </p:txBody>
@@ -1229,17 +1171,17 @@
           <a:lstStyle/>
           <a:p>
             <a:r>
-              <a:t>Kernbotschaft: Kein Grad ist pauschal besser – Passgenauigkeit entscheidet.</a:t>
-            </a:r>
-          </a:p>
-          <a:p>
-            <a:r>
-              <a:t>FK, die grundsätzlich auf Grad 1 verbleibt, verhindert aktiv Teamentwicklung.</a:t>
-            </a:r>
-          </a:p>
-          <a:p>
-            <a:r>
-              <a:t>Praxisbeispiel: D3-Berater + Standardkundentermin = Grad 3/4, nicht Grad 1.</a:t>
+              <a:t>Martell (2023, Q-258). Kernsatz für den Trainer: „Wer die ersten zehn Prozent spart, bezahlt sie in der Nacharbeit doppelt.“</a:t>
+            </a:r>
+          </a:p>
+          <a:p>
+            <a:r>
+              <a:t>Rückbindung an SDT (Block II vorbereiten): Eingreifen in den mittleren 80 % zerstört Autonomieerleben und programmiert Rückdelegation.</a:t>
+            </a:r>
+          </a:p>
+          <a:p>
+            <a:r>
+              <a:t>Kurze Selbstprüfung in die Runde: Welchen der beiden Fehler machen Sie häufiger?</a:t>
             </a:r>
           </a:p>
         </p:txBody>
@@ -1389,7 +1331,17 @@
           <a:lstStyle/>
           <a:p>
             <a:r>
-              <a:t>Siehe Trainerhandbuch (Sektion 3) für Moderationshinweise, Timing und erwartete Teilnehmerreaktionen.</a:t>
+              <a:t>Martell (2023, Q-258). Direkte Gegenmaßnahme zum Monkey-Management der Vorfolie – nicht Abwehr, sondern Vereinbarung.</a:t>
+            </a:r>
+          </a:p>
+          <a:p>
+            <a:r>
+              <a:t>Einführung als Ankündigung im Teammeeting, nicht als Einzelfallkorrektur – sonst wirkt es wie Abweisung.</a:t>
+            </a:r>
+          </a:p>
+          <a:p>
+            <a:r>
+              <a:t>Brücke zu TL10: Die Berichtsstruktur nach oben (Lage – Optionen – Empfehlung) ist dasselbe Prinzip in Richtung Vorgesetzter.</a:t>
             </a:r>
           </a:p>
         </p:txBody>
@@ -5235,6 +5187,652 @@
             <a:avLst/>
           </a:prstGeom>
           <a:solidFill>
+            <a:srgbClr val="EDEDF3"/>
+          </a:solidFill>
+          <a:ln>
+            <a:noFill/>
+          </a:ln>
+        </p:spPr>
+        <p:style>
+          <a:lnRef idx="1">
+            <a:schemeClr val="accent1"/>
+          </a:lnRef>
+          <a:fillRef idx="3">
+            <a:schemeClr val="accent1"/>
+          </a:fillRef>
+          <a:effectRef idx="2">
+            <a:schemeClr val="accent1"/>
+          </a:effectRef>
+          <a:fontRef idx="minor">
+            <a:schemeClr val="lt1"/>
+          </a:fontRef>
+        </p:style>
+        <p:txBody>
+          <a:bodyPr rtlCol="0" anchor="ctr"/>
+          <a:lstStyle/>
+          <a:p>
+            <a:pPr algn="ctr"/>
+          </a:p>
+        </p:txBody>
+      </p:sp>
+      <p:sp>
+        <p:nvSpPr>
+          <p:cNvPr id="3" name="Rectangle 2"/>
+          <p:cNvSpPr/>
+          <p:nvPr/>
+        </p:nvSpPr>
+        <p:spPr>
+          <a:xfrm>
+            <a:off x="0" y="0"/>
+            <a:ext cx="12188952" cy="50292"/>
+          </a:xfrm>
+          <a:prstGeom prst="rect">
+            <a:avLst/>
+          </a:prstGeom>
+          <a:solidFill>
+            <a:srgbClr val="1F2C56"/>
+          </a:solidFill>
+          <a:ln>
+            <a:noFill/>
+          </a:ln>
+        </p:spPr>
+        <p:style>
+          <a:lnRef idx="1">
+            <a:schemeClr val="accent1"/>
+          </a:lnRef>
+          <a:fillRef idx="3">
+            <a:schemeClr val="accent1"/>
+          </a:fillRef>
+          <a:effectRef idx="2">
+            <a:schemeClr val="accent1"/>
+          </a:effectRef>
+          <a:fontRef idx="minor">
+            <a:schemeClr val="lt1"/>
+          </a:fontRef>
+        </p:style>
+        <p:txBody>
+          <a:bodyPr rtlCol="0" anchor="ctr"/>
+          <a:lstStyle/>
+          <a:p>
+            <a:pPr algn="ctr"/>
+          </a:p>
+        </p:txBody>
+      </p:sp>
+      <p:sp>
+        <p:nvSpPr>
+          <p:cNvPr id="4" name="TextBox 3"/>
+          <p:cNvSpPr txBox="1"/>
+          <p:nvPr/>
+        </p:nvSpPr>
+        <p:spPr>
+          <a:xfrm>
+            <a:off x="685800" y="109728"/>
+            <a:ext cx="10817352" cy="228600"/>
+          </a:xfrm>
+          <a:prstGeom prst="rect">
+            <a:avLst/>
+          </a:prstGeom>
+          <a:noFill/>
+        </p:spPr>
+        <p:txBody>
+          <a:bodyPr wrap="none">
+            <a:spAutoFit/>
+          </a:bodyPr>
+          <a:lstStyle/>
+          <a:p>
+            <a:pPr algn="l"/>
+            <a:r>
+              <a:rPr sz="750">
+                <a:solidFill>
+                  <a:srgbClr val="78808C"/>
+                </a:solidFill>
+                <a:latin typeface="Consolas"/>
+              </a:rPr>
+              <a:t>TL03  ·  INHALT</a:t>
+            </a:r>
+          </a:p>
+        </p:txBody>
+      </p:sp>
+      <p:sp>
+        <p:nvSpPr>
+          <p:cNvPr id="5" name="Rectangle 4"/>
+          <p:cNvSpPr/>
+          <p:nvPr/>
+        </p:nvSpPr>
+        <p:spPr>
+          <a:xfrm>
+            <a:off x="0" y="1234440"/>
+            <a:ext cx="12188952" cy="12700"/>
+          </a:xfrm>
+          <a:prstGeom prst="rect">
+            <a:avLst/>
+          </a:prstGeom>
+          <a:solidFill>
+            <a:srgbClr val="D8DFE4"/>
+          </a:solidFill>
+          <a:ln>
+            <a:noFill/>
+          </a:ln>
+        </p:spPr>
+        <p:style>
+          <a:lnRef idx="1">
+            <a:schemeClr val="accent1"/>
+          </a:lnRef>
+          <a:fillRef idx="3">
+            <a:schemeClr val="accent1"/>
+          </a:fillRef>
+          <a:effectRef idx="2">
+            <a:schemeClr val="accent1"/>
+          </a:effectRef>
+          <a:fontRef idx="minor">
+            <a:schemeClr val="lt1"/>
+          </a:fontRef>
+        </p:style>
+        <p:txBody>
+          <a:bodyPr rtlCol="0" anchor="ctr"/>
+          <a:lstStyle/>
+          <a:p>
+            <a:pPr algn="ctr"/>
+          </a:p>
+        </p:txBody>
+      </p:sp>
+      <p:sp>
+        <p:nvSpPr>
+          <p:cNvPr id="6" name="Rectangle 5"/>
+          <p:cNvSpPr/>
+          <p:nvPr/>
+        </p:nvSpPr>
+        <p:spPr>
+          <a:xfrm>
+            <a:off x="685800" y="502920"/>
+            <a:ext cx="36576" cy="658368"/>
+          </a:xfrm>
+          <a:prstGeom prst="rect">
+            <a:avLst/>
+          </a:prstGeom>
+          <a:solidFill>
+            <a:srgbClr val="D9C089"/>
+          </a:solidFill>
+          <a:ln>
+            <a:noFill/>
+          </a:ln>
+        </p:spPr>
+        <p:style>
+          <a:lnRef idx="1">
+            <a:schemeClr val="accent1"/>
+          </a:lnRef>
+          <a:fillRef idx="3">
+            <a:schemeClr val="accent1"/>
+          </a:fillRef>
+          <a:effectRef idx="2">
+            <a:schemeClr val="accent1"/>
+          </a:effectRef>
+          <a:fontRef idx="minor">
+            <a:schemeClr val="lt1"/>
+          </a:fontRef>
+        </p:style>
+        <p:txBody>
+          <a:bodyPr rtlCol="0" anchor="ctr"/>
+          <a:lstStyle/>
+          <a:p>
+            <a:pPr algn="ctr"/>
+          </a:p>
+        </p:txBody>
+      </p:sp>
+      <p:sp>
+        <p:nvSpPr>
+          <p:cNvPr id="7" name="TextBox 6"/>
+          <p:cNvSpPr txBox="1"/>
+          <p:nvPr/>
+        </p:nvSpPr>
+        <p:spPr>
+          <a:xfrm>
+            <a:off x="813816" y="502920"/>
+            <a:ext cx="10634472" cy="685800"/>
+          </a:xfrm>
+          <a:prstGeom prst="rect">
+            <a:avLst/>
+          </a:prstGeom>
+          <a:noFill/>
+        </p:spPr>
+        <p:txBody>
+          <a:bodyPr wrap="square">
+            <a:spAutoFit/>
+          </a:bodyPr>
+          <a:lstStyle/>
+          <a:p>
+            <a:pPr algn="l"/>
+            <a:r>
+              <a:rPr sz="2400" b="1" i="0">
+                <a:solidFill>
+                  <a:srgbClr val="1F2C56"/>
+                </a:solidFill>
+                <a:latin typeface="Arial"/>
+              </a:rPr>
+              <a:t>1-3-1: Wer ein Problem bringt, bringt auch Optionen und eine Empfehlung</a:t>
+            </a:r>
+          </a:p>
+        </p:txBody>
+      </p:sp>
+      <p:sp>
+        <p:nvSpPr>
+          <p:cNvPr id="8" name="TextBox 7"/>
+          <p:cNvSpPr txBox="1"/>
+          <p:nvPr/>
+        </p:nvSpPr>
+        <p:spPr>
+          <a:xfrm>
+            <a:off x="685800" y="1417320"/>
+            <a:ext cx="10817352" cy="4892040"/>
+          </a:xfrm>
+          <a:prstGeom prst="rect">
+            <a:avLst/>
+          </a:prstGeom>
+          <a:noFill/>
+        </p:spPr>
+        <p:txBody>
+          <a:bodyPr wrap="square" anchor="ctr">
+            <a:spAutoFit/>
+          </a:bodyPr>
+          <a:lstStyle/>
+          <a:p>
+            <a:pPr marL="177800" indent="-177800">
+              <a:spcBef>
+                <a:spcPts val="600"/>
+              </a:spcBef>
+              <a:spcAft>
+                <a:spcPts val="200"/>
+              </a:spcAft>
+            </a:pPr>
+            <a:r>
+              <a:rPr sz="1200" i="1">
+                <a:solidFill>
+                  <a:srgbClr val="3D5466"/>
+                </a:solidFill>
+                <a:latin typeface="Arial"/>
+              </a:rPr>
+              <a:t>→  Bei uns kommen Probleme als 1-3-1 – 1 Problem, 3 Lösungsoptionen, 1 eigene Empfehlung.</a:t>
+            </a:r>
+          </a:p>
+          <a:p>
+            <a:pPr marL="190500" indent="-190500">
+              <a:spcBef>
+                <a:spcPts val="400"/>
+              </a:spcBef>
+              <a:spcAft>
+                <a:spcPts val="200"/>
+              </a:spcAft>
+            </a:pPr>
+            <a:r>
+              <a:rPr sz="1300">
+                <a:solidFill>
+                  <a:srgbClr val="3D5466"/>
+                </a:solidFill>
+                <a:latin typeface="Arial"/>
+              </a:rPr>
+              <a:t>▸  Der Mitarbeitende hat gedacht, bevor er kommt – der Affe bleibt auf seinem Rücken</a:t>
+            </a:r>
+          </a:p>
+          <a:p>
+            <a:pPr marL="190500" indent="-190500">
+              <a:spcBef>
+                <a:spcPts val="400"/>
+              </a:spcBef>
+              <a:spcAft>
+                <a:spcPts val="200"/>
+              </a:spcAft>
+            </a:pPr>
+            <a:r>
+              <a:rPr sz="1300">
+                <a:solidFill>
+                  <a:srgbClr val="3D5466"/>
+                </a:solidFill>
+                <a:latin typeface="Arial"/>
+              </a:rPr>
+              <a:t>▸  Die Führungskraft entscheidet oder gibt Rückendeckung (Grad 2–3), statt zu übernehmen</a:t>
+            </a:r>
+          </a:p>
+          <a:p>
+            <a:pPr marL="190500" indent="-190500">
+              <a:spcBef>
+                <a:spcPts val="400"/>
+              </a:spcBef>
+              <a:spcAft>
+                <a:spcPts val="200"/>
+              </a:spcAft>
+            </a:pPr>
+            <a:r>
+              <a:rPr sz="1300">
+                <a:solidFill>
+                  <a:srgbClr val="3D5466"/>
+                </a:solidFill>
+                <a:latin typeface="Arial"/>
+              </a:rPr>
+              <a:t>▸  Als Teamregel etabliert, wird 1-3-1 zum Kulturbaustein für Eigenverantwortung</a:t>
+            </a:r>
+          </a:p>
+        </p:txBody>
+      </p:sp>
+      <p:sp>
+        <p:nvSpPr>
+          <p:cNvPr id="9" name="Rectangle 8"/>
+          <p:cNvSpPr/>
+          <p:nvPr/>
+        </p:nvSpPr>
+        <p:spPr>
+          <a:xfrm>
+            <a:off x="0" y="6510528"/>
+            <a:ext cx="12188952" cy="347472"/>
+          </a:xfrm>
+          <a:prstGeom prst="rect">
+            <a:avLst/>
+          </a:prstGeom>
+          <a:solidFill>
+            <a:srgbClr val="0A1937"/>
+          </a:solidFill>
+          <a:ln>
+            <a:noFill/>
+          </a:ln>
+        </p:spPr>
+        <p:style>
+          <a:lnRef idx="1">
+            <a:schemeClr val="accent1"/>
+          </a:lnRef>
+          <a:fillRef idx="3">
+            <a:schemeClr val="accent1"/>
+          </a:fillRef>
+          <a:effectRef idx="2">
+            <a:schemeClr val="accent1"/>
+          </a:effectRef>
+          <a:fontRef idx="minor">
+            <a:schemeClr val="lt1"/>
+          </a:fontRef>
+        </p:style>
+        <p:txBody>
+          <a:bodyPr rtlCol="0" anchor="ctr"/>
+          <a:lstStyle/>
+          <a:p>
+            <a:pPr algn="ctr"/>
+          </a:p>
+        </p:txBody>
+      </p:sp>
+      <p:sp>
+        <p:nvSpPr>
+          <p:cNvPr id="10" name="TextBox 9"/>
+          <p:cNvSpPr txBox="1"/>
+          <p:nvPr/>
+        </p:nvSpPr>
+        <p:spPr>
+          <a:xfrm>
+            <a:off x="685800" y="6583680"/>
+            <a:ext cx="6490411" cy="256032"/>
+          </a:xfrm>
+          <a:prstGeom prst="rect">
+            <a:avLst/>
+          </a:prstGeom>
+          <a:noFill/>
+        </p:spPr>
+        <p:txBody>
+          <a:bodyPr wrap="none">
+            <a:spAutoFit/>
+          </a:bodyPr>
+          <a:lstStyle/>
+          <a:p>
+            <a:pPr algn="l"/>
+            <a:r>
+              <a:rPr sz="700">
+                <a:solidFill>
+                  <a:srgbClr val="A0B4D2"/>
+                </a:solidFill>
+                <a:latin typeface="Consolas"/>
+              </a:rPr>
+              <a:t>FKB Campus  ·  TL03</a:t>
+            </a:r>
+          </a:p>
+        </p:txBody>
+      </p:sp>
+    </p:spTree>
+  </p:cSld>
+  <p:clrMapOvr>
+    <a:masterClrMapping/>
+  </p:clrMapOvr>
+</p:sld>
+</file>
+
+<file path=ppt/slides/slide11.xml><?xml version="1.0" encoding="utf-8"?>
+<p:sld xmlns:a="http://schemas.openxmlformats.org/drawingml/2006/main" xmlns:p="http://schemas.openxmlformats.org/presentationml/2006/main" xmlns:r="http://schemas.openxmlformats.org/officeDocument/2006/relationships">
+  <p:cSld>
+    <p:spTree>
+      <p:nvGrpSpPr>
+        <p:cNvPr id="1" name=""/>
+        <p:cNvGrpSpPr/>
+        <p:nvPr/>
+      </p:nvGrpSpPr>
+      <p:grpSpPr/>
+      <p:sp>
+        <p:nvSpPr>
+          <p:cNvPr id="2" name="Rectangle 1"/>
+          <p:cNvSpPr/>
+          <p:nvPr/>
+        </p:nvSpPr>
+        <p:spPr>
+          <a:xfrm>
+            <a:off x="0" y="0"/>
+            <a:ext cx="12188952" cy="6858000"/>
+          </a:xfrm>
+          <a:prstGeom prst="rect">
+            <a:avLst/>
+          </a:prstGeom>
+          <a:solidFill>
+            <a:srgbClr val="1F2C56"/>
+          </a:solidFill>
+          <a:ln>
+            <a:noFill/>
+          </a:ln>
+        </p:spPr>
+        <p:style>
+          <a:lnRef idx="1">
+            <a:schemeClr val="accent1"/>
+          </a:lnRef>
+          <a:fillRef idx="3">
+            <a:schemeClr val="accent1"/>
+          </a:fillRef>
+          <a:effectRef idx="2">
+            <a:schemeClr val="accent1"/>
+          </a:effectRef>
+          <a:fontRef idx="minor">
+            <a:schemeClr val="lt1"/>
+          </a:fontRef>
+        </p:style>
+        <p:txBody>
+          <a:bodyPr rtlCol="0" anchor="ctr"/>
+          <a:lstStyle/>
+          <a:p>
+            <a:pPr algn="ctr"/>
+          </a:p>
+        </p:txBody>
+      </p:sp>
+      <p:sp>
+        <p:nvSpPr>
+          <p:cNvPr id="3" name="Rectangle 2"/>
+          <p:cNvSpPr/>
+          <p:nvPr/>
+        </p:nvSpPr>
+        <p:spPr>
+          <a:xfrm>
+            <a:off x="685800" y="2788920"/>
+            <a:ext cx="548640" cy="38100"/>
+          </a:xfrm>
+          <a:prstGeom prst="rect">
+            <a:avLst/>
+          </a:prstGeom>
+          <a:solidFill>
+            <a:srgbClr val="D9C089"/>
+          </a:solidFill>
+          <a:ln>
+            <a:noFill/>
+          </a:ln>
+        </p:spPr>
+        <p:style>
+          <a:lnRef idx="1">
+            <a:schemeClr val="accent1"/>
+          </a:lnRef>
+          <a:fillRef idx="3">
+            <a:schemeClr val="accent1"/>
+          </a:fillRef>
+          <a:effectRef idx="2">
+            <a:schemeClr val="accent1"/>
+          </a:effectRef>
+          <a:fontRef idx="minor">
+            <a:schemeClr val="lt1"/>
+          </a:fontRef>
+        </p:style>
+        <p:txBody>
+          <a:bodyPr rtlCol="0" anchor="ctr"/>
+          <a:lstStyle/>
+          <a:p>
+            <a:pPr algn="ctr"/>
+          </a:p>
+        </p:txBody>
+      </p:sp>
+      <p:sp>
+        <p:nvSpPr>
+          <p:cNvPr id="4" name="TextBox 3"/>
+          <p:cNvSpPr txBox="1"/>
+          <p:nvPr/>
+        </p:nvSpPr>
+        <p:spPr>
+          <a:xfrm>
+            <a:off x="685800" y="3017520"/>
+            <a:ext cx="10817352" cy="1463040"/>
+          </a:xfrm>
+          <a:prstGeom prst="rect">
+            <a:avLst/>
+          </a:prstGeom>
+          <a:noFill/>
+        </p:spPr>
+        <p:txBody>
+          <a:bodyPr wrap="square">
+            <a:spAutoFit/>
+          </a:bodyPr>
+          <a:lstStyle/>
+          <a:p>
+            <a:pPr algn="l"/>
+            <a:r>
+              <a:rPr sz="4000" b="1" i="0">
+                <a:solidFill>
+                  <a:srgbClr val="FFFFFF"/>
+                </a:solidFill>
+                <a:latin typeface="Arial"/>
+              </a:rPr>
+              <a:t>II · Motivation</a:t>
+            </a:r>
+          </a:p>
+        </p:txBody>
+      </p:sp>
+      <p:sp>
+        <p:nvSpPr>
+          <p:cNvPr id="5" name="TextBox 4"/>
+          <p:cNvSpPr txBox="1"/>
+          <p:nvPr/>
+        </p:nvSpPr>
+        <p:spPr>
+          <a:xfrm>
+            <a:off x="685800" y="4480560"/>
+            <a:ext cx="8653881" cy="1280160"/>
+          </a:xfrm>
+          <a:prstGeom prst="rect">
+            <a:avLst/>
+          </a:prstGeom>
+          <a:noFill/>
+        </p:spPr>
+        <p:txBody>
+          <a:bodyPr wrap="square">
+            <a:spAutoFit/>
+          </a:bodyPr>
+          <a:lstStyle/>
+          <a:p>
+            <a:pPr algn="l"/>
+            <a:r>
+              <a:rPr sz="1600" b="0" i="0">
+                <a:solidFill>
+                  <a:srgbClr val="C8D2E6"/>
+                </a:solidFill>
+                <a:latin typeface="Arial"/>
+              </a:rPr>
+              <a:t>Was hält mein Team wirklich bei der Stange – und was kostet es Energie?</a:t>
+            </a:r>
+          </a:p>
+        </p:txBody>
+      </p:sp>
+      <p:sp>
+        <p:nvSpPr>
+          <p:cNvPr id="6" name="TextBox 5"/>
+          <p:cNvSpPr txBox="1"/>
+          <p:nvPr/>
+        </p:nvSpPr>
+        <p:spPr>
+          <a:xfrm>
+            <a:off x="685800" y="6355080"/>
+            <a:ext cx="10817352" cy="274320"/>
+          </a:xfrm>
+          <a:prstGeom prst="rect">
+            <a:avLst/>
+          </a:prstGeom>
+          <a:noFill/>
+        </p:spPr>
+        <p:txBody>
+          <a:bodyPr wrap="none">
+            <a:spAutoFit/>
+          </a:bodyPr>
+          <a:lstStyle/>
+          <a:p>
+            <a:pPr algn="l"/>
+            <a:r>
+              <a:rPr sz="700">
+                <a:solidFill>
+                  <a:srgbClr val="8CA0C3"/>
+                </a:solidFill>
+                <a:latin typeface="Consolas"/>
+              </a:rPr>
+              <a:t>FKB Campus  ·  TL03</a:t>
+            </a:r>
+          </a:p>
+        </p:txBody>
+      </p:sp>
+    </p:spTree>
+  </p:cSld>
+  <p:clrMapOvr>
+    <a:masterClrMapping/>
+  </p:clrMapOvr>
+</p:sld>
+</file>
+
+<file path=ppt/slides/slide12.xml><?xml version="1.0" encoding="utf-8"?>
+<p:sld xmlns:a="http://schemas.openxmlformats.org/drawingml/2006/main" xmlns:p="http://schemas.openxmlformats.org/presentationml/2006/main" xmlns:r="http://schemas.openxmlformats.org/officeDocument/2006/relationships">
+  <p:cSld>
+    <p:spTree>
+      <p:nvGrpSpPr>
+        <p:cNvPr id="1" name=""/>
+        <p:cNvGrpSpPr/>
+        <p:nvPr/>
+      </p:nvGrpSpPr>
+      <p:grpSpPr/>
+      <p:sp>
+        <p:nvSpPr>
+          <p:cNvPr id="2" name="Rectangle 1"/>
+          <p:cNvSpPr/>
+          <p:nvPr/>
+        </p:nvSpPr>
+        <p:spPr>
+          <a:xfrm>
+            <a:off x="0" y="0"/>
+            <a:ext cx="12188952" cy="6858000"/>
+          </a:xfrm>
+          <a:prstGeom prst="rect">
+            <a:avLst/>
+          </a:prstGeom>
+          <a:solidFill>
             <a:srgbClr val="FFFFFF"/>
           </a:solidFill>
           <a:ln>
@@ -5655,7 +6253,7 @@
 </p:sld>
 </file>
 
-<file path=ppt/slides/slide11.xml><?xml version="1.0" encoding="utf-8"?>
+<file path=ppt/slides/slide13.xml><?xml version="1.0" encoding="utf-8"?>
 <p:sld xmlns:a="http://schemas.openxmlformats.org/drawingml/2006/main" xmlns:p="http://schemas.openxmlformats.org/presentationml/2006/main" xmlns:r="http://schemas.openxmlformats.org/officeDocument/2006/relationships">
   <p:cSld>
     <p:spTree>
@@ -6080,687 +6678,6 @@
 </p:sld>
 </file>
 
-<file path=ppt/slides/slide12.xml><?xml version="1.0" encoding="utf-8"?>
-<p:sld xmlns:a="http://schemas.openxmlformats.org/drawingml/2006/main" xmlns:p="http://schemas.openxmlformats.org/presentationml/2006/main" xmlns:r="http://schemas.openxmlformats.org/officeDocument/2006/relationships">
-  <p:cSld>
-    <p:spTree>
-      <p:nvGrpSpPr>
-        <p:cNvPr id="1" name=""/>
-        <p:cNvGrpSpPr/>
-        <p:nvPr/>
-      </p:nvGrpSpPr>
-      <p:grpSpPr/>
-      <p:sp>
-        <p:nvSpPr>
-          <p:cNvPr id="2" name="Rectangle 1"/>
-          <p:cNvSpPr/>
-          <p:nvPr/>
-        </p:nvSpPr>
-        <p:spPr>
-          <a:xfrm>
-            <a:off x="0" y="0"/>
-            <a:ext cx="12188952" cy="6858000"/>
-          </a:xfrm>
-          <a:prstGeom prst="rect">
-            <a:avLst/>
-          </a:prstGeom>
-          <a:solidFill>
-            <a:srgbClr val="1F2C56"/>
-          </a:solidFill>
-          <a:ln>
-            <a:noFill/>
-          </a:ln>
-        </p:spPr>
-        <p:style>
-          <a:lnRef idx="1">
-            <a:schemeClr val="accent1"/>
-          </a:lnRef>
-          <a:fillRef idx="3">
-            <a:schemeClr val="accent1"/>
-          </a:fillRef>
-          <a:effectRef idx="2">
-            <a:schemeClr val="accent1"/>
-          </a:effectRef>
-          <a:fontRef idx="minor">
-            <a:schemeClr val="lt1"/>
-          </a:fontRef>
-        </p:style>
-        <p:txBody>
-          <a:bodyPr rtlCol="0" anchor="ctr"/>
-          <a:lstStyle/>
-          <a:p>
-            <a:pPr algn="ctr"/>
-          </a:p>
-        </p:txBody>
-      </p:sp>
-      <p:sp>
-        <p:nvSpPr>
-          <p:cNvPr id="3" name="TextBox 2"/>
-          <p:cNvSpPr txBox="1"/>
-          <p:nvPr/>
-        </p:nvSpPr>
-        <p:spPr>
-          <a:xfrm>
-            <a:off x="685800" y="2377440"/>
-            <a:ext cx="10817352" cy="365760"/>
-          </a:xfrm>
-          <a:prstGeom prst="rect">
-            <a:avLst/>
-          </a:prstGeom>
-          <a:noFill/>
-        </p:spPr>
-        <p:txBody>
-          <a:bodyPr wrap="none">
-            <a:spAutoFit/>
-          </a:bodyPr>
-          <a:lstStyle/>
-          <a:p>
-            <a:pPr algn="l"/>
-            <a:r>
-              <a:rPr sz="1200">
-                <a:solidFill>
-                  <a:srgbClr val="D9C089"/>
-                </a:solidFill>
-                <a:latin typeface="Consolas"/>
-              </a:rPr>
-              <a:t>FALLANALYSE</a:t>
-            </a:r>
-          </a:p>
-        </p:txBody>
-      </p:sp>
-      <p:sp>
-        <p:nvSpPr>
-          <p:cNvPr id="4" name="Rectangle 3"/>
-          <p:cNvSpPr/>
-          <p:nvPr/>
-        </p:nvSpPr>
-        <p:spPr>
-          <a:xfrm>
-            <a:off x="685800" y="2788920"/>
-            <a:ext cx="548640" cy="38100"/>
-          </a:xfrm>
-          <a:prstGeom prst="rect">
-            <a:avLst/>
-          </a:prstGeom>
-          <a:solidFill>
-            <a:srgbClr val="D9C089"/>
-          </a:solidFill>
-          <a:ln>
-            <a:noFill/>
-          </a:ln>
-        </p:spPr>
-        <p:style>
-          <a:lnRef idx="1">
-            <a:schemeClr val="accent1"/>
-          </a:lnRef>
-          <a:fillRef idx="3">
-            <a:schemeClr val="accent1"/>
-          </a:fillRef>
-          <a:effectRef idx="2">
-            <a:schemeClr val="accent1"/>
-          </a:effectRef>
-          <a:fontRef idx="minor">
-            <a:schemeClr val="lt1"/>
-          </a:fontRef>
-        </p:style>
-        <p:txBody>
-          <a:bodyPr rtlCol="0" anchor="ctr"/>
-          <a:lstStyle/>
-          <a:p>
-            <a:pPr algn="ctr"/>
-          </a:p>
-        </p:txBody>
-      </p:sp>
-      <p:sp>
-        <p:nvSpPr>
-          <p:cNvPr id="5" name="TextBox 4"/>
-          <p:cNvSpPr txBox="1"/>
-          <p:nvPr/>
-        </p:nvSpPr>
-        <p:spPr>
-          <a:xfrm>
-            <a:off x="685800" y="3017520"/>
-            <a:ext cx="10817352" cy="1463040"/>
-          </a:xfrm>
-          <a:prstGeom prst="rect">
-            <a:avLst/>
-          </a:prstGeom>
-          <a:noFill/>
-        </p:spPr>
-        <p:txBody>
-          <a:bodyPr wrap="square">
-            <a:spAutoFit/>
-          </a:bodyPr>
-          <a:lstStyle/>
-          <a:p>
-            <a:pPr algn="l"/>
-            <a:r>
-              <a:rPr sz="4000" b="1" i="0">
-                <a:solidFill>
-                  <a:srgbClr val="FFFFFF"/>
-                </a:solidFill>
-                <a:latin typeface="Arial"/>
-              </a:rPr>
-              <a:t>Praxisfall: Das Team im Sturm</a:t>
-            </a:r>
-          </a:p>
-        </p:txBody>
-      </p:sp>
-      <p:sp>
-        <p:nvSpPr>
-          <p:cNvPr id="6" name="TextBox 5"/>
-          <p:cNvSpPr txBox="1"/>
-          <p:nvPr/>
-        </p:nvSpPr>
-        <p:spPr>
-          <a:xfrm>
-            <a:off x="685800" y="4480560"/>
-            <a:ext cx="8653881" cy="1280160"/>
-          </a:xfrm>
-          <a:prstGeom prst="rect">
-            <a:avLst/>
-          </a:prstGeom>
-          <a:noFill/>
-        </p:spPr>
-        <p:txBody>
-          <a:bodyPr wrap="square">
-            <a:spAutoFit/>
-          </a:bodyPr>
-          <a:lstStyle/>
-          <a:p>
-            <a:pPr algn="l"/>
-            <a:r>
-              <a:rPr sz="1600" b="0" i="0">
-                <a:solidFill>
-                  <a:srgbClr val="C8D2E6"/>
-                </a:solidFill>
-                <a:latin typeface="Arial"/>
-              </a:rPr>
-              <a:t>Teamphase bestimmen, SDT-Profile analysieren, Delegationsentscheidung vorbereiten</a:t>
-            </a:r>
-          </a:p>
-        </p:txBody>
-      </p:sp>
-      <p:sp>
-        <p:nvSpPr>
-          <p:cNvPr id="7" name="TextBox 6"/>
-          <p:cNvSpPr txBox="1"/>
-          <p:nvPr/>
-        </p:nvSpPr>
-        <p:spPr>
-          <a:xfrm>
-            <a:off x="685800" y="6355080"/>
-            <a:ext cx="10817352" cy="274320"/>
-          </a:xfrm>
-          <a:prstGeom prst="rect">
-            <a:avLst/>
-          </a:prstGeom>
-          <a:noFill/>
-        </p:spPr>
-        <p:txBody>
-          <a:bodyPr wrap="none">
-            <a:spAutoFit/>
-          </a:bodyPr>
-          <a:lstStyle/>
-          <a:p>
-            <a:pPr algn="l"/>
-            <a:r>
-              <a:rPr sz="700">
-                <a:solidFill>
-                  <a:srgbClr val="8CA0C3"/>
-                </a:solidFill>
-                <a:latin typeface="Consolas"/>
-              </a:rPr>
-              <a:t>FKB Campus  ·  TL03</a:t>
-            </a:r>
-          </a:p>
-        </p:txBody>
-      </p:sp>
-    </p:spTree>
-  </p:cSld>
-  <p:clrMapOvr>
-    <a:masterClrMapping/>
-  </p:clrMapOvr>
-</p:sld>
-</file>
-
-<file path=ppt/slides/slide13.xml><?xml version="1.0" encoding="utf-8"?>
-<p:sld xmlns:a="http://schemas.openxmlformats.org/drawingml/2006/main" xmlns:p="http://schemas.openxmlformats.org/presentationml/2006/main" xmlns:r="http://schemas.openxmlformats.org/officeDocument/2006/relationships">
-  <p:cSld>
-    <p:spTree>
-      <p:nvGrpSpPr>
-        <p:cNvPr id="1" name=""/>
-        <p:cNvGrpSpPr/>
-        <p:nvPr/>
-      </p:nvGrpSpPr>
-      <p:grpSpPr/>
-      <p:sp>
-        <p:nvSpPr>
-          <p:cNvPr id="2" name="Rectangle 1"/>
-          <p:cNvSpPr/>
-          <p:nvPr/>
-        </p:nvSpPr>
-        <p:spPr>
-          <a:xfrm>
-            <a:off x="0" y="0"/>
-            <a:ext cx="12188952" cy="6858000"/>
-          </a:xfrm>
-          <a:prstGeom prst="rect">
-            <a:avLst/>
-          </a:prstGeom>
-          <a:solidFill>
-            <a:srgbClr val="EDEDF3"/>
-          </a:solidFill>
-          <a:ln>
-            <a:noFill/>
-          </a:ln>
-        </p:spPr>
-        <p:style>
-          <a:lnRef idx="1">
-            <a:schemeClr val="accent1"/>
-          </a:lnRef>
-          <a:fillRef idx="3">
-            <a:schemeClr val="accent1"/>
-          </a:fillRef>
-          <a:effectRef idx="2">
-            <a:schemeClr val="accent1"/>
-          </a:effectRef>
-          <a:fontRef idx="minor">
-            <a:schemeClr val="lt1"/>
-          </a:fontRef>
-        </p:style>
-        <p:txBody>
-          <a:bodyPr rtlCol="0" anchor="ctr"/>
-          <a:lstStyle/>
-          <a:p>
-            <a:pPr algn="ctr"/>
-          </a:p>
-        </p:txBody>
-      </p:sp>
-      <p:sp>
-        <p:nvSpPr>
-          <p:cNvPr id="3" name="Rectangle 2"/>
-          <p:cNvSpPr/>
-          <p:nvPr/>
-        </p:nvSpPr>
-        <p:spPr>
-          <a:xfrm>
-            <a:off x="0" y="0"/>
-            <a:ext cx="12188952" cy="50292"/>
-          </a:xfrm>
-          <a:prstGeom prst="rect">
-            <a:avLst/>
-          </a:prstGeom>
-          <a:solidFill>
-            <a:srgbClr val="1F2C56"/>
-          </a:solidFill>
-          <a:ln>
-            <a:noFill/>
-          </a:ln>
-        </p:spPr>
-        <p:style>
-          <a:lnRef idx="1">
-            <a:schemeClr val="accent1"/>
-          </a:lnRef>
-          <a:fillRef idx="3">
-            <a:schemeClr val="accent1"/>
-          </a:fillRef>
-          <a:effectRef idx="2">
-            <a:schemeClr val="accent1"/>
-          </a:effectRef>
-          <a:fontRef idx="minor">
-            <a:schemeClr val="lt1"/>
-          </a:fontRef>
-        </p:style>
-        <p:txBody>
-          <a:bodyPr rtlCol="0" anchor="ctr"/>
-          <a:lstStyle/>
-          <a:p>
-            <a:pPr algn="ctr"/>
-          </a:p>
-        </p:txBody>
-      </p:sp>
-      <p:sp>
-        <p:nvSpPr>
-          <p:cNvPr id="4" name="TextBox 3"/>
-          <p:cNvSpPr txBox="1"/>
-          <p:nvPr/>
-        </p:nvSpPr>
-        <p:spPr>
-          <a:xfrm>
-            <a:off x="685800" y="109728"/>
-            <a:ext cx="10817352" cy="228600"/>
-          </a:xfrm>
-          <a:prstGeom prst="rect">
-            <a:avLst/>
-          </a:prstGeom>
-          <a:noFill/>
-        </p:spPr>
-        <p:txBody>
-          <a:bodyPr wrap="none">
-            <a:spAutoFit/>
-          </a:bodyPr>
-          <a:lstStyle/>
-          <a:p>
-            <a:pPr algn="l"/>
-            <a:r>
-              <a:rPr sz="750">
-                <a:solidFill>
-                  <a:srgbClr val="78808C"/>
-                </a:solidFill>
-                <a:latin typeface="Consolas"/>
-              </a:rPr>
-              <a:t>TL03  ·  INHALT</a:t>
-            </a:r>
-          </a:p>
-        </p:txBody>
-      </p:sp>
-      <p:sp>
-        <p:nvSpPr>
-          <p:cNvPr id="5" name="Rectangle 4"/>
-          <p:cNvSpPr/>
-          <p:nvPr/>
-        </p:nvSpPr>
-        <p:spPr>
-          <a:xfrm>
-            <a:off x="0" y="1234440"/>
-            <a:ext cx="12188952" cy="12700"/>
-          </a:xfrm>
-          <a:prstGeom prst="rect">
-            <a:avLst/>
-          </a:prstGeom>
-          <a:solidFill>
-            <a:srgbClr val="D8DFE4"/>
-          </a:solidFill>
-          <a:ln>
-            <a:noFill/>
-          </a:ln>
-        </p:spPr>
-        <p:style>
-          <a:lnRef idx="1">
-            <a:schemeClr val="accent1"/>
-          </a:lnRef>
-          <a:fillRef idx="3">
-            <a:schemeClr val="accent1"/>
-          </a:fillRef>
-          <a:effectRef idx="2">
-            <a:schemeClr val="accent1"/>
-          </a:effectRef>
-          <a:fontRef idx="minor">
-            <a:schemeClr val="lt1"/>
-          </a:fontRef>
-        </p:style>
-        <p:txBody>
-          <a:bodyPr rtlCol="0" anchor="ctr"/>
-          <a:lstStyle/>
-          <a:p>
-            <a:pPr algn="ctr"/>
-          </a:p>
-        </p:txBody>
-      </p:sp>
-      <p:sp>
-        <p:nvSpPr>
-          <p:cNvPr id="6" name="Rectangle 5"/>
-          <p:cNvSpPr/>
-          <p:nvPr/>
-        </p:nvSpPr>
-        <p:spPr>
-          <a:xfrm>
-            <a:off x="685800" y="502920"/>
-            <a:ext cx="36576" cy="658368"/>
-          </a:xfrm>
-          <a:prstGeom prst="rect">
-            <a:avLst/>
-          </a:prstGeom>
-          <a:solidFill>
-            <a:srgbClr val="D9C089"/>
-          </a:solidFill>
-          <a:ln>
-            <a:noFill/>
-          </a:ln>
-        </p:spPr>
-        <p:style>
-          <a:lnRef idx="1">
-            <a:schemeClr val="accent1"/>
-          </a:lnRef>
-          <a:fillRef idx="3">
-            <a:schemeClr val="accent1"/>
-          </a:fillRef>
-          <a:effectRef idx="2">
-            <a:schemeClr val="accent1"/>
-          </a:effectRef>
-          <a:fontRef idx="minor">
-            <a:schemeClr val="lt1"/>
-          </a:fontRef>
-        </p:style>
-        <p:txBody>
-          <a:bodyPr rtlCol="0" anchor="ctr"/>
-          <a:lstStyle/>
-          <a:p>
-            <a:pPr algn="ctr"/>
-          </a:p>
-        </p:txBody>
-      </p:sp>
-      <p:sp>
-        <p:nvSpPr>
-          <p:cNvPr id="7" name="TextBox 6"/>
-          <p:cNvSpPr txBox="1"/>
-          <p:nvPr/>
-        </p:nvSpPr>
-        <p:spPr>
-          <a:xfrm>
-            <a:off x="813816" y="502920"/>
-            <a:ext cx="10634472" cy="685800"/>
-          </a:xfrm>
-          <a:prstGeom prst="rect">
-            <a:avLst/>
-          </a:prstGeom>
-          <a:noFill/>
-        </p:spPr>
-        <p:txBody>
-          <a:bodyPr wrap="square">
-            <a:spAutoFit/>
-          </a:bodyPr>
-          <a:lstStyle/>
-          <a:p>
-            <a:pPr algn="l"/>
-            <a:r>
-              <a:rPr sz="2400" b="1" i="0">
-                <a:solidFill>
-                  <a:srgbClr val="1F2C56"/>
-                </a:solidFill>
-                <a:latin typeface="Arial"/>
-              </a:rPr>
-              <a:t>Sabine K.: Ein neues Team – und alle schauen zu ihr hin</a:t>
-            </a:r>
-          </a:p>
-        </p:txBody>
-      </p:sp>
-      <p:sp>
-        <p:nvSpPr>
-          <p:cNvPr id="8" name="TextBox 7"/>
-          <p:cNvSpPr txBox="1"/>
-          <p:nvPr/>
-        </p:nvSpPr>
-        <p:spPr>
-          <a:xfrm>
-            <a:off x="685800" y="1417320"/>
-            <a:ext cx="10817352" cy="4892040"/>
-          </a:xfrm>
-          <a:prstGeom prst="rect">
-            <a:avLst/>
-          </a:prstGeom>
-          <a:noFill/>
-        </p:spPr>
-        <p:txBody>
-          <a:bodyPr wrap="square" anchor="ctr">
-            <a:spAutoFit/>
-          </a:bodyPr>
-          <a:lstStyle/>
-          <a:p>
-            <a:pPr marL="190500" indent="-190500">
-              <a:spcBef>
-                <a:spcPts val="400"/>
-              </a:spcBef>
-              <a:spcAft>
-                <a:spcPts val="200"/>
-              </a:spcAft>
-            </a:pPr>
-            <a:r>
-              <a:rPr sz="1300">
-                <a:solidFill>
-                  <a:srgbClr val="3D5466"/>
-                </a:solidFill>
-                <a:latin typeface="Arial"/>
-              </a:rPr>
-              <a:t>▸  10 Berater aus zwei Fusionsteams</a:t>
-            </a:r>
-          </a:p>
-          <a:p>
-            <a:pPr marL="190500" indent="-190500">
-              <a:spcBef>
-                <a:spcPts val="400"/>
-              </a:spcBef>
-              <a:spcAft>
-                <a:spcPts val="200"/>
-              </a:spcAft>
-            </a:pPr>
-            <a:r>
-              <a:rPr sz="1300">
-                <a:solidFill>
-                  <a:srgbClr val="3D5466"/>
-                </a:solidFill>
-                <a:latin typeface="Arial"/>
-              </a:rPr>
-              <a:t>▸  Thomas F.: informeller Meinungsführer, distanziert</a:t>
-            </a:r>
-          </a:p>
-          <a:p>
-            <a:pPr marL="190500" indent="-190500">
-              <a:spcBef>
-                <a:spcPts val="400"/>
-              </a:spcBef>
-              <a:spcAft>
-                <a:spcPts val="200"/>
-              </a:spcAft>
-            </a:pPr>
-            <a:r>
-              <a:rPr sz="1300">
-                <a:solidFill>
-                  <a:srgbClr val="3D5466"/>
-                </a:solidFill>
-                <a:latin typeface="Arial"/>
-              </a:rPr>
-              <a:t>▸  Julia S.: D3 kompetent, bittet um unnötige Entscheidungen</a:t>
-            </a:r>
-          </a:p>
-          <a:p>
-            <a:pPr marL="190500" indent="-190500">
-              <a:spcBef>
-                <a:spcPts val="400"/>
-              </a:spcBef>
-              <a:spcAft>
-                <a:spcPts val="200"/>
-              </a:spcAft>
-            </a:pPr>
-            <a:r>
-              <a:rPr sz="1300">
-                <a:solidFill>
-                  <a:srgbClr val="3D5466"/>
-                </a:solidFill>
-                <a:latin typeface="Arial"/>
-              </a:rPr>
-              <a:t>▸  Teammeetings korrekt, aber ohne Energie</a:t>
-            </a:r>
-          </a:p>
-        </p:txBody>
-      </p:sp>
-      <p:sp>
-        <p:nvSpPr>
-          <p:cNvPr id="9" name="Rectangle 8"/>
-          <p:cNvSpPr/>
-          <p:nvPr/>
-        </p:nvSpPr>
-        <p:spPr>
-          <a:xfrm>
-            <a:off x="0" y="6510528"/>
-            <a:ext cx="12188952" cy="347472"/>
-          </a:xfrm>
-          <a:prstGeom prst="rect">
-            <a:avLst/>
-          </a:prstGeom>
-          <a:solidFill>
-            <a:srgbClr val="0A1937"/>
-          </a:solidFill>
-          <a:ln>
-            <a:noFill/>
-          </a:ln>
-        </p:spPr>
-        <p:style>
-          <a:lnRef idx="1">
-            <a:schemeClr val="accent1"/>
-          </a:lnRef>
-          <a:fillRef idx="3">
-            <a:schemeClr val="accent1"/>
-          </a:fillRef>
-          <a:effectRef idx="2">
-            <a:schemeClr val="accent1"/>
-          </a:effectRef>
-          <a:fontRef idx="minor">
-            <a:schemeClr val="lt1"/>
-          </a:fontRef>
-        </p:style>
-        <p:txBody>
-          <a:bodyPr rtlCol="0" anchor="ctr"/>
-          <a:lstStyle/>
-          <a:p>
-            <a:pPr algn="ctr"/>
-          </a:p>
-        </p:txBody>
-      </p:sp>
-      <p:sp>
-        <p:nvSpPr>
-          <p:cNvPr id="10" name="TextBox 9"/>
-          <p:cNvSpPr txBox="1"/>
-          <p:nvPr/>
-        </p:nvSpPr>
-        <p:spPr>
-          <a:xfrm>
-            <a:off x="685800" y="6583680"/>
-            <a:ext cx="6490411" cy="256032"/>
-          </a:xfrm>
-          <a:prstGeom prst="rect">
-            <a:avLst/>
-          </a:prstGeom>
-          <a:noFill/>
-        </p:spPr>
-        <p:txBody>
-          <a:bodyPr wrap="none">
-            <a:spAutoFit/>
-          </a:bodyPr>
-          <a:lstStyle/>
-          <a:p>
-            <a:pPr algn="l"/>
-            <a:r>
-              <a:rPr sz="700">
-                <a:solidFill>
-                  <a:srgbClr val="A0B4D2"/>
-                </a:solidFill>
-                <a:latin typeface="Consolas"/>
-              </a:rPr>
-              <a:t>FKB Campus  ·  TL03</a:t>
-            </a:r>
-          </a:p>
-        </p:txBody>
-      </p:sp>
-    </p:spTree>
-  </p:cSld>
-  <p:clrMapOvr>
-    <a:masterClrMapping/>
-  </p:clrMapOvr>
-</p:sld>
-</file>
-
 <file path=ppt/slides/slide14.xml><?xml version="1.0" encoding="utf-8"?>
 <p:sld xmlns:a="http://schemas.openxmlformats.org/drawingml/2006/main" xmlns:p="http://schemas.openxmlformats.org/presentationml/2006/main" xmlns:r="http://schemas.openxmlformats.org/officeDocument/2006/relationships">
   <p:cSld>
@@ -6786,7 +6703,7 @@
             <a:avLst/>
           </a:prstGeom>
           <a:solidFill>
-            <a:srgbClr val="EDEDF3"/>
+            <a:srgbClr val="1F2C56"/>
           </a:solidFill>
           <a:ln>
             <a:noFill/>
@@ -6816,57 +6733,14 @@
       </p:sp>
       <p:sp>
         <p:nvSpPr>
-          <p:cNvPr id="3" name="Rectangle 2"/>
-          <p:cNvSpPr/>
-          <p:nvPr/>
-        </p:nvSpPr>
-        <p:spPr>
-          <a:xfrm>
-            <a:off x="0" y="0"/>
-            <a:ext cx="12188952" cy="50292"/>
-          </a:xfrm>
-          <a:prstGeom prst="rect">
-            <a:avLst/>
-          </a:prstGeom>
-          <a:solidFill>
-            <a:srgbClr val="1F2C56"/>
-          </a:solidFill>
-          <a:ln>
-            <a:noFill/>
-          </a:ln>
-        </p:spPr>
-        <p:style>
-          <a:lnRef idx="1">
-            <a:schemeClr val="accent1"/>
-          </a:lnRef>
-          <a:fillRef idx="3">
-            <a:schemeClr val="accent1"/>
-          </a:fillRef>
-          <a:effectRef idx="2">
-            <a:schemeClr val="accent1"/>
-          </a:effectRef>
-          <a:fontRef idx="minor">
-            <a:schemeClr val="lt1"/>
-          </a:fontRef>
-        </p:style>
-        <p:txBody>
-          <a:bodyPr rtlCol="0" anchor="ctr"/>
-          <a:lstStyle/>
-          <a:p>
-            <a:pPr algn="ctr"/>
-          </a:p>
-        </p:txBody>
-      </p:sp>
-      <p:sp>
-        <p:nvSpPr>
-          <p:cNvPr id="4" name="TextBox 3"/>
+          <p:cNvPr id="3" name="TextBox 2"/>
           <p:cNvSpPr txBox="1"/>
           <p:nvPr/>
         </p:nvSpPr>
         <p:spPr>
           <a:xfrm>
-            <a:off x="685800" y="109728"/>
-            <a:ext cx="10817352" cy="228600"/>
+            <a:off x="685800" y="2377440"/>
+            <a:ext cx="10817352" cy="365760"/>
           </a:xfrm>
           <a:prstGeom prst="rect">
             <a:avLst/>
@@ -6881,70 +6755,27 @@
           <a:p>
             <a:pPr algn="l"/>
             <a:r>
-              <a:rPr sz="750">
-                <a:solidFill>
-                  <a:srgbClr val="78808C"/>
+              <a:rPr sz="1200">
+                <a:solidFill>
+                  <a:srgbClr val="D9C089"/>
                 </a:solidFill>
                 <a:latin typeface="Consolas"/>
               </a:rPr>
-              <a:t>TL03  ·  INHALT</a:t>
-            </a:r>
-          </a:p>
-        </p:txBody>
-      </p:sp>
-      <p:sp>
-        <p:nvSpPr>
-          <p:cNvPr id="5" name="Rectangle 4"/>
+              <a:t>FALLANALYSE</a:t>
+            </a:r>
+          </a:p>
+        </p:txBody>
+      </p:sp>
+      <p:sp>
+        <p:nvSpPr>
+          <p:cNvPr id="4" name="Rectangle 3"/>
           <p:cNvSpPr/>
           <p:nvPr/>
         </p:nvSpPr>
         <p:spPr>
           <a:xfrm>
-            <a:off x="0" y="1234440"/>
-            <a:ext cx="12188952" cy="12700"/>
-          </a:xfrm>
-          <a:prstGeom prst="rect">
-            <a:avLst/>
-          </a:prstGeom>
-          <a:solidFill>
-            <a:srgbClr val="D8DFE4"/>
-          </a:solidFill>
-          <a:ln>
-            <a:noFill/>
-          </a:ln>
-        </p:spPr>
-        <p:style>
-          <a:lnRef idx="1">
-            <a:schemeClr val="accent1"/>
-          </a:lnRef>
-          <a:fillRef idx="3">
-            <a:schemeClr val="accent1"/>
-          </a:fillRef>
-          <a:effectRef idx="2">
-            <a:schemeClr val="accent1"/>
-          </a:effectRef>
-          <a:fontRef idx="minor">
-            <a:schemeClr val="lt1"/>
-          </a:fontRef>
-        </p:style>
-        <p:txBody>
-          <a:bodyPr rtlCol="0" anchor="ctr"/>
-          <a:lstStyle/>
-          <a:p>
-            <a:pPr algn="ctr"/>
-          </a:p>
-        </p:txBody>
-      </p:sp>
-      <p:sp>
-        <p:nvSpPr>
-          <p:cNvPr id="6" name="Rectangle 5"/>
-          <p:cNvSpPr/>
-          <p:nvPr/>
-        </p:nvSpPr>
-        <p:spPr>
-          <a:xfrm>
-            <a:off x="685800" y="502920"/>
-            <a:ext cx="36576" cy="658368"/>
+            <a:off x="685800" y="2788920"/>
+            <a:ext cx="548640" cy="38100"/>
           </a:xfrm>
           <a:prstGeom prst="rect">
             <a:avLst/>
@@ -6980,14 +6811,14 @@
       </p:sp>
       <p:sp>
         <p:nvSpPr>
-          <p:cNvPr id="7" name="TextBox 6"/>
+          <p:cNvPr id="5" name="TextBox 4"/>
           <p:cNvSpPr txBox="1"/>
           <p:nvPr/>
         </p:nvSpPr>
         <p:spPr>
           <a:xfrm>
-            <a:off x="813816" y="502920"/>
-            <a:ext cx="10634472" cy="685800"/>
+            <a:off x="685800" y="3017520"/>
+            <a:ext cx="10817352" cy="1463040"/>
           </a:xfrm>
           <a:prstGeom prst="rect">
             <a:avLst/>
@@ -7002,70 +6833,62 @@
           <a:p>
             <a:pPr algn="l"/>
             <a:r>
-              <a:rPr sz="2400" b="1" i="0">
-                <a:solidFill>
-                  <a:srgbClr val="1F2C56"/>
+              <a:rPr sz="4000" b="1" i="0">
+                <a:solidFill>
+                  <a:srgbClr val="FFFFFF"/>
                 </a:solidFill>
                 <a:latin typeface="Arial"/>
               </a:rPr>
-              <a:t>IV · Teamphasen</a:t>
-            </a:r>
-          </a:p>
-        </p:txBody>
-      </p:sp>
-      <p:sp>
-        <p:nvSpPr>
-          <p:cNvPr id="8" name="Rectangle 7"/>
-          <p:cNvSpPr/>
-          <p:nvPr/>
-        </p:nvSpPr>
-        <p:spPr>
-          <a:xfrm>
-            <a:off x="0" y="6510528"/>
-            <a:ext cx="12188952" cy="347472"/>
-          </a:xfrm>
-          <a:prstGeom prst="rect">
-            <a:avLst/>
-          </a:prstGeom>
-          <a:solidFill>
-            <a:srgbClr val="0A1937"/>
-          </a:solidFill>
-          <a:ln>
-            <a:noFill/>
-          </a:ln>
-        </p:spPr>
-        <p:style>
-          <a:lnRef idx="1">
-            <a:schemeClr val="accent1"/>
-          </a:lnRef>
-          <a:fillRef idx="3">
-            <a:schemeClr val="accent1"/>
-          </a:fillRef>
-          <a:effectRef idx="2">
-            <a:schemeClr val="accent1"/>
-          </a:effectRef>
-          <a:fontRef idx="minor">
-            <a:schemeClr val="lt1"/>
-          </a:fontRef>
-        </p:style>
-        <p:txBody>
-          <a:bodyPr rtlCol="0" anchor="ctr"/>
-          <a:lstStyle/>
-          <a:p>
-            <a:pPr algn="ctr"/>
-          </a:p>
-        </p:txBody>
-      </p:sp>
-      <p:sp>
-        <p:nvSpPr>
-          <p:cNvPr id="9" name="TextBox 8"/>
+              <a:t>Praxisfall: Das Team im Sturm</a:t>
+            </a:r>
+          </a:p>
+        </p:txBody>
+      </p:sp>
+      <p:sp>
+        <p:nvSpPr>
+          <p:cNvPr id="6" name="TextBox 5"/>
           <p:cNvSpPr txBox="1"/>
           <p:nvPr/>
         </p:nvSpPr>
         <p:spPr>
           <a:xfrm>
-            <a:off x="685800" y="6583680"/>
-            <a:ext cx="6490411" cy="256032"/>
+            <a:off x="685800" y="4480560"/>
+            <a:ext cx="8653881" cy="1280160"/>
+          </a:xfrm>
+          <a:prstGeom prst="rect">
+            <a:avLst/>
+          </a:prstGeom>
+          <a:noFill/>
+        </p:spPr>
+        <p:txBody>
+          <a:bodyPr wrap="square">
+            <a:spAutoFit/>
+          </a:bodyPr>
+          <a:lstStyle/>
+          <a:p>
+            <a:pPr algn="l"/>
+            <a:r>
+              <a:rPr sz="1600" b="0" i="0">
+                <a:solidFill>
+                  <a:srgbClr val="C8D2E6"/>
+                </a:solidFill>
+                <a:latin typeface="Arial"/>
+              </a:rPr>
+              <a:t>Teamphase bestimmen, SDT-Profile analysieren, Delegationsentscheidung vorbereiten</a:t>
+            </a:r>
+          </a:p>
+        </p:txBody>
+      </p:sp>
+      <p:sp>
+        <p:nvSpPr>
+          <p:cNvPr id="7" name="TextBox 6"/>
+          <p:cNvSpPr txBox="1"/>
+          <p:nvPr/>
+        </p:nvSpPr>
+        <p:spPr>
+          <a:xfrm>
+            <a:off x="685800" y="6355080"/>
+            <a:ext cx="10817352" cy="274320"/>
           </a:xfrm>
           <a:prstGeom prst="rect">
             <a:avLst/>
@@ -7082,7 +6905,7 @@
             <a:r>
               <a:rPr sz="700">
                 <a:solidFill>
-                  <a:srgbClr val="A0B4D2"/>
+                  <a:srgbClr val="8CA0C3"/>
                 </a:solidFill>
                 <a:latin typeface="Consolas"/>
               </a:rPr>
@@ -7124,7 +6947,7 @@
             <a:avLst/>
           </a:prstGeom>
           <a:solidFill>
-            <a:srgbClr val="FFFFFF"/>
+            <a:srgbClr val="EDEDF3"/>
           </a:solidFill>
           <a:ln>
             <a:noFill/>
@@ -7225,43 +7048,51 @@
                 </a:solidFill>
                 <a:latin typeface="Consolas"/>
               </a:rPr>
-              <a:t>TL03  ·  SCHAUBILD</a:t>
-            </a:r>
-          </a:p>
-        </p:txBody>
-      </p:sp>
-      <p:sp>
-        <p:nvSpPr>
-          <p:cNvPr id="5" name="TextBox 4"/>
-          <p:cNvSpPr txBox="1"/>
-          <p:nvPr/>
-        </p:nvSpPr>
-        <p:spPr>
-          <a:xfrm>
-            <a:off x="685800" y="502920"/>
-            <a:ext cx="10817352" cy="594360"/>
-          </a:xfrm>
-          <a:prstGeom prst="rect">
-            <a:avLst/>
-          </a:prstGeom>
-          <a:noFill/>
-        </p:spPr>
-        <p:txBody>
-          <a:bodyPr wrap="square">
-            <a:spAutoFit/>
-          </a:bodyPr>
-          <a:lstStyle/>
-          <a:p>
-            <a:pPr algn="l"/>
-            <a:r>
-              <a:rPr sz="2000" b="1" i="0">
-                <a:solidFill>
-                  <a:srgbClr val="1F2C56"/>
-                </a:solidFill>
-                <a:latin typeface="Arial"/>
-              </a:rPr>
-              <a:t>Teamphasenuhr: Teams können jederzeit zurückfallen</a:t>
-            </a:r>
+              <a:t>TL03  ·  INHALT</a:t>
+            </a:r>
+          </a:p>
+        </p:txBody>
+      </p:sp>
+      <p:sp>
+        <p:nvSpPr>
+          <p:cNvPr id="5" name="Rectangle 4"/>
+          <p:cNvSpPr/>
+          <p:nvPr/>
+        </p:nvSpPr>
+        <p:spPr>
+          <a:xfrm>
+            <a:off x="0" y="1234440"/>
+            <a:ext cx="12188952" cy="12700"/>
+          </a:xfrm>
+          <a:prstGeom prst="rect">
+            <a:avLst/>
+          </a:prstGeom>
+          <a:solidFill>
+            <a:srgbClr val="D8DFE4"/>
+          </a:solidFill>
+          <a:ln>
+            <a:noFill/>
+          </a:ln>
+        </p:spPr>
+        <p:style>
+          <a:lnRef idx="1">
+            <a:schemeClr val="accent1"/>
+          </a:lnRef>
+          <a:fillRef idx="3">
+            <a:schemeClr val="accent1"/>
+          </a:fillRef>
+          <a:effectRef idx="2">
+            <a:schemeClr val="accent1"/>
+          </a:effectRef>
+          <a:fontRef idx="minor">
+            <a:schemeClr val="lt1"/>
+          </a:fontRef>
+        </p:style>
+        <p:txBody>
+          <a:bodyPr rtlCol="0" anchor="ctr"/>
+          <a:lstStyle/>
+          <a:p>
+            <a:pPr algn="ctr"/>
           </a:p>
         </p:txBody>
       </p:sp>
@@ -7273,8 +7104,8 @@
         </p:nvSpPr>
         <p:spPr>
           <a:xfrm>
-            <a:off x="685800" y="1143000"/>
-            <a:ext cx="10817352" cy="25400"/>
+            <a:off x="685800" y="502920"/>
+            <a:ext cx="36576" cy="658368"/>
           </a:xfrm>
           <a:prstGeom prst="rect">
             <a:avLst/>
@@ -7308,33 +7139,143 @@
           </a:p>
         </p:txBody>
       </p:sp>
-      <p:pic>
-        <p:nvPicPr>
-          <p:cNvPr id="7" name="Picture 6" descr="image.png"/>
-          <p:cNvPicPr>
-            <a:picLocks noChangeAspect="1"/>
-          </p:cNvPicPr>
-          <p:nvPr/>
-        </p:nvPicPr>
-        <p:blipFill>
-          <a:blip r:embed="rId2"/>
-          <a:stretch>
-            <a:fillRect/>
-          </a:stretch>
-        </p:blipFill>
-        <p:spPr>
-          <a:xfrm>
-            <a:off x="3060522" y="1325880"/>
-            <a:ext cx="6067907" cy="4937760"/>
-          </a:xfrm>
-          <a:prstGeom prst="rect">
-            <a:avLst/>
-          </a:prstGeom>
-        </p:spPr>
-      </p:pic>
-      <p:sp>
-        <p:nvSpPr>
-          <p:cNvPr id="8" name="Rectangle 7"/>
+      <p:sp>
+        <p:nvSpPr>
+          <p:cNvPr id="7" name="TextBox 6"/>
+          <p:cNvSpPr txBox="1"/>
+          <p:nvPr/>
+        </p:nvSpPr>
+        <p:spPr>
+          <a:xfrm>
+            <a:off x="813816" y="502920"/>
+            <a:ext cx="10634472" cy="685800"/>
+          </a:xfrm>
+          <a:prstGeom prst="rect">
+            <a:avLst/>
+          </a:prstGeom>
+          <a:noFill/>
+        </p:spPr>
+        <p:txBody>
+          <a:bodyPr wrap="square">
+            <a:spAutoFit/>
+          </a:bodyPr>
+          <a:lstStyle/>
+          <a:p>
+            <a:pPr algn="l"/>
+            <a:r>
+              <a:rPr sz="2400" b="1" i="0">
+                <a:solidFill>
+                  <a:srgbClr val="1F2C56"/>
+                </a:solidFill>
+                <a:latin typeface="Arial"/>
+              </a:rPr>
+              <a:t>Sabine K.: Ein neues Team – und alle schauen zu ihr hin</a:t>
+            </a:r>
+          </a:p>
+        </p:txBody>
+      </p:sp>
+      <p:sp>
+        <p:nvSpPr>
+          <p:cNvPr id="8" name="TextBox 7"/>
+          <p:cNvSpPr txBox="1"/>
+          <p:nvPr/>
+        </p:nvSpPr>
+        <p:spPr>
+          <a:xfrm>
+            <a:off x="685800" y="1417320"/>
+            <a:ext cx="10817352" cy="4892040"/>
+          </a:xfrm>
+          <a:prstGeom prst="rect">
+            <a:avLst/>
+          </a:prstGeom>
+          <a:noFill/>
+        </p:spPr>
+        <p:txBody>
+          <a:bodyPr wrap="square" anchor="ctr">
+            <a:spAutoFit/>
+          </a:bodyPr>
+          <a:lstStyle/>
+          <a:p>
+            <a:pPr marL="190500" indent="-190500">
+              <a:spcBef>
+                <a:spcPts val="400"/>
+              </a:spcBef>
+              <a:spcAft>
+                <a:spcPts val="200"/>
+              </a:spcAft>
+            </a:pPr>
+            <a:r>
+              <a:rPr sz="1300">
+                <a:solidFill>
+                  <a:srgbClr val="3D5466"/>
+                </a:solidFill>
+                <a:latin typeface="Arial"/>
+              </a:rPr>
+              <a:t>▸  10 Berater aus zwei Fusionsteams</a:t>
+            </a:r>
+          </a:p>
+          <a:p>
+            <a:pPr marL="190500" indent="-190500">
+              <a:spcBef>
+                <a:spcPts val="400"/>
+              </a:spcBef>
+              <a:spcAft>
+                <a:spcPts val="200"/>
+              </a:spcAft>
+            </a:pPr>
+            <a:r>
+              <a:rPr sz="1300">
+                <a:solidFill>
+                  <a:srgbClr val="3D5466"/>
+                </a:solidFill>
+                <a:latin typeface="Arial"/>
+              </a:rPr>
+              <a:t>▸  Thomas F.: informeller Meinungsführer, distanziert</a:t>
+            </a:r>
+          </a:p>
+          <a:p>
+            <a:pPr marL="190500" indent="-190500">
+              <a:spcBef>
+                <a:spcPts val="400"/>
+              </a:spcBef>
+              <a:spcAft>
+                <a:spcPts val="200"/>
+              </a:spcAft>
+            </a:pPr>
+            <a:r>
+              <a:rPr sz="1300">
+                <a:solidFill>
+                  <a:srgbClr val="3D5466"/>
+                </a:solidFill>
+                <a:latin typeface="Arial"/>
+              </a:rPr>
+              <a:t>▸  Julia S.: D3 kompetent, bittet um unnötige Entscheidungen</a:t>
+            </a:r>
+          </a:p>
+          <a:p>
+            <a:pPr marL="190500" indent="-190500">
+              <a:spcBef>
+                <a:spcPts val="400"/>
+              </a:spcBef>
+              <a:spcAft>
+                <a:spcPts val="200"/>
+              </a:spcAft>
+            </a:pPr>
+            <a:r>
+              <a:rPr sz="1300">
+                <a:solidFill>
+                  <a:srgbClr val="3D5466"/>
+                </a:solidFill>
+                <a:latin typeface="Arial"/>
+              </a:rPr>
+              <a:t>▸  Teammeetings korrekt, aber ohne Energie</a:t>
+            </a:r>
+          </a:p>
+        </p:txBody>
+      </p:sp>
+      <p:sp>
+        <p:nvSpPr>
+          <p:cNvPr id="9" name="Rectangle 8"/>
           <p:cNvSpPr/>
           <p:nvPr/>
         </p:nvSpPr>
@@ -7377,7 +7318,7 @@
       </p:sp>
       <p:sp>
         <p:nvSpPr>
-          <p:cNvPr id="9" name="TextBox 8"/>
+          <p:cNvPr id="10" name="TextBox 9"/>
           <p:cNvSpPr txBox="1"/>
           <p:nvPr/>
         </p:nvSpPr>
@@ -7406,41 +7347,6 @@
                 <a:latin typeface="Consolas"/>
               </a:rPr>
               <a:t>FKB Campus  ·  TL03</a:t>
-            </a:r>
-          </a:p>
-        </p:txBody>
-      </p:sp>
-      <p:sp>
-        <p:nvSpPr>
-          <p:cNvPr id="10" name="TextBox 9"/>
-          <p:cNvSpPr txBox="1"/>
-          <p:nvPr/>
-        </p:nvSpPr>
-        <p:spPr>
-          <a:xfrm>
-            <a:off x="7176211" y="6583680"/>
-            <a:ext cx="4326940" cy="256032"/>
-          </a:xfrm>
-          <a:prstGeom prst="rect">
-            <a:avLst/>
-          </a:prstGeom>
-          <a:noFill/>
-        </p:spPr>
-        <p:txBody>
-          <a:bodyPr wrap="none">
-            <a:spAutoFit/>
-          </a:bodyPr>
-          <a:lstStyle/>
-          <a:p>
-            <a:pPr algn="r"/>
-            <a:r>
-              <a:rPr sz="700">
-                <a:solidFill>
-                  <a:srgbClr val="A0B4D2"/>
-                </a:solidFill>
-                <a:latin typeface="Consolas"/>
-              </a:rPr>
-              <a:t>Schaubild</a:t>
             </a:r>
           </a:p>
         </p:txBody>
@@ -7454,6 +7360,569 @@
 </file>
 
 <file path=ppt/slides/slide16.xml><?xml version="1.0" encoding="utf-8"?>
+<p:sld xmlns:a="http://schemas.openxmlformats.org/drawingml/2006/main" xmlns:p="http://schemas.openxmlformats.org/presentationml/2006/main" xmlns:r="http://schemas.openxmlformats.org/officeDocument/2006/relationships">
+  <p:cSld>
+    <p:spTree>
+      <p:nvGrpSpPr>
+        <p:cNvPr id="1" name=""/>
+        <p:cNvGrpSpPr/>
+        <p:nvPr/>
+      </p:nvGrpSpPr>
+      <p:grpSpPr/>
+      <p:sp>
+        <p:nvSpPr>
+          <p:cNvPr id="2" name="Rectangle 1"/>
+          <p:cNvSpPr/>
+          <p:nvPr/>
+        </p:nvSpPr>
+        <p:spPr>
+          <a:xfrm>
+            <a:off x="0" y="0"/>
+            <a:ext cx="12188952" cy="6858000"/>
+          </a:xfrm>
+          <a:prstGeom prst="rect">
+            <a:avLst/>
+          </a:prstGeom>
+          <a:solidFill>
+            <a:srgbClr val="1F2C56"/>
+          </a:solidFill>
+          <a:ln>
+            <a:noFill/>
+          </a:ln>
+        </p:spPr>
+        <p:style>
+          <a:lnRef idx="1">
+            <a:schemeClr val="accent1"/>
+          </a:lnRef>
+          <a:fillRef idx="3">
+            <a:schemeClr val="accent1"/>
+          </a:fillRef>
+          <a:effectRef idx="2">
+            <a:schemeClr val="accent1"/>
+          </a:effectRef>
+          <a:fontRef idx="minor">
+            <a:schemeClr val="lt1"/>
+          </a:fontRef>
+        </p:style>
+        <p:txBody>
+          <a:bodyPr rtlCol="0" anchor="ctr"/>
+          <a:lstStyle/>
+          <a:p>
+            <a:pPr algn="ctr"/>
+          </a:p>
+        </p:txBody>
+      </p:sp>
+      <p:sp>
+        <p:nvSpPr>
+          <p:cNvPr id="3" name="Rectangle 2"/>
+          <p:cNvSpPr/>
+          <p:nvPr/>
+        </p:nvSpPr>
+        <p:spPr>
+          <a:xfrm>
+            <a:off x="685800" y="2788920"/>
+            <a:ext cx="548640" cy="38100"/>
+          </a:xfrm>
+          <a:prstGeom prst="rect">
+            <a:avLst/>
+          </a:prstGeom>
+          <a:solidFill>
+            <a:srgbClr val="D9C089"/>
+          </a:solidFill>
+          <a:ln>
+            <a:noFill/>
+          </a:ln>
+        </p:spPr>
+        <p:style>
+          <a:lnRef idx="1">
+            <a:schemeClr val="accent1"/>
+          </a:lnRef>
+          <a:fillRef idx="3">
+            <a:schemeClr val="accent1"/>
+          </a:fillRef>
+          <a:effectRef idx="2">
+            <a:schemeClr val="accent1"/>
+          </a:effectRef>
+          <a:fontRef idx="minor">
+            <a:schemeClr val="lt1"/>
+          </a:fontRef>
+        </p:style>
+        <p:txBody>
+          <a:bodyPr rtlCol="0" anchor="ctr"/>
+          <a:lstStyle/>
+          <a:p>
+            <a:pPr algn="ctr"/>
+          </a:p>
+        </p:txBody>
+      </p:sp>
+      <p:sp>
+        <p:nvSpPr>
+          <p:cNvPr id="4" name="TextBox 3"/>
+          <p:cNvSpPr txBox="1"/>
+          <p:nvPr/>
+        </p:nvSpPr>
+        <p:spPr>
+          <a:xfrm>
+            <a:off x="685800" y="3017520"/>
+            <a:ext cx="10817352" cy="1463040"/>
+          </a:xfrm>
+          <a:prstGeom prst="rect">
+            <a:avLst/>
+          </a:prstGeom>
+          <a:noFill/>
+        </p:spPr>
+        <p:txBody>
+          <a:bodyPr wrap="square">
+            <a:spAutoFit/>
+          </a:bodyPr>
+          <a:lstStyle/>
+          <a:p>
+            <a:pPr algn="l"/>
+            <a:r>
+              <a:rPr sz="4000" b="1" i="0">
+                <a:solidFill>
+                  <a:srgbClr val="FFFFFF"/>
+                </a:solidFill>
+                <a:latin typeface="Arial"/>
+              </a:rPr>
+              <a:t>IV · Teamphasen</a:t>
+            </a:r>
+          </a:p>
+        </p:txBody>
+      </p:sp>
+      <p:sp>
+        <p:nvSpPr>
+          <p:cNvPr id="5" name="TextBox 4"/>
+          <p:cNvSpPr txBox="1"/>
+          <p:nvPr/>
+        </p:nvSpPr>
+        <p:spPr>
+          <a:xfrm>
+            <a:off x="685800" y="4480560"/>
+            <a:ext cx="8653881" cy="1280160"/>
+          </a:xfrm>
+          <a:prstGeom prst="rect">
+            <a:avLst/>
+          </a:prstGeom>
+          <a:noFill/>
+        </p:spPr>
+        <p:txBody>
+          <a:bodyPr wrap="square">
+            <a:spAutoFit/>
+          </a:bodyPr>
+          <a:lstStyle/>
+          <a:p>
+            <a:pPr algn="l"/>
+            <a:r>
+              <a:rPr sz="1600" b="0" i="0">
+                <a:solidFill>
+                  <a:srgbClr val="C8D2E6"/>
+                </a:solidFill>
+                <a:latin typeface="Arial"/>
+              </a:rPr>
+              <a:t>In welcher Phase ist mein Team – und was verlangt das von mir?</a:t>
+            </a:r>
+          </a:p>
+        </p:txBody>
+      </p:sp>
+      <p:sp>
+        <p:nvSpPr>
+          <p:cNvPr id="6" name="TextBox 5"/>
+          <p:cNvSpPr txBox="1"/>
+          <p:nvPr/>
+        </p:nvSpPr>
+        <p:spPr>
+          <a:xfrm>
+            <a:off x="685800" y="6355080"/>
+            <a:ext cx="10817352" cy="274320"/>
+          </a:xfrm>
+          <a:prstGeom prst="rect">
+            <a:avLst/>
+          </a:prstGeom>
+          <a:noFill/>
+        </p:spPr>
+        <p:txBody>
+          <a:bodyPr wrap="none">
+            <a:spAutoFit/>
+          </a:bodyPr>
+          <a:lstStyle/>
+          <a:p>
+            <a:pPr algn="l"/>
+            <a:r>
+              <a:rPr sz="700">
+                <a:solidFill>
+                  <a:srgbClr val="8CA0C3"/>
+                </a:solidFill>
+                <a:latin typeface="Consolas"/>
+              </a:rPr>
+              <a:t>FKB Campus  ·  TL03</a:t>
+            </a:r>
+          </a:p>
+        </p:txBody>
+      </p:sp>
+    </p:spTree>
+  </p:cSld>
+  <p:clrMapOvr>
+    <a:masterClrMapping/>
+  </p:clrMapOvr>
+</p:sld>
+</file>
+
+<file path=ppt/slides/slide17.xml><?xml version="1.0" encoding="utf-8"?>
+<p:sld xmlns:a="http://schemas.openxmlformats.org/drawingml/2006/main" xmlns:p="http://schemas.openxmlformats.org/presentationml/2006/main" xmlns:r="http://schemas.openxmlformats.org/officeDocument/2006/relationships">
+  <p:cSld>
+    <p:spTree>
+      <p:nvGrpSpPr>
+        <p:cNvPr id="1" name=""/>
+        <p:cNvGrpSpPr/>
+        <p:nvPr/>
+      </p:nvGrpSpPr>
+      <p:grpSpPr/>
+      <p:sp>
+        <p:nvSpPr>
+          <p:cNvPr id="2" name="Rectangle 1"/>
+          <p:cNvSpPr/>
+          <p:nvPr/>
+        </p:nvSpPr>
+        <p:spPr>
+          <a:xfrm>
+            <a:off x="0" y="0"/>
+            <a:ext cx="12188952" cy="6858000"/>
+          </a:xfrm>
+          <a:prstGeom prst="rect">
+            <a:avLst/>
+          </a:prstGeom>
+          <a:solidFill>
+            <a:srgbClr val="FFFFFF"/>
+          </a:solidFill>
+          <a:ln>
+            <a:noFill/>
+          </a:ln>
+        </p:spPr>
+        <p:style>
+          <a:lnRef idx="1">
+            <a:schemeClr val="accent1"/>
+          </a:lnRef>
+          <a:fillRef idx="3">
+            <a:schemeClr val="accent1"/>
+          </a:fillRef>
+          <a:effectRef idx="2">
+            <a:schemeClr val="accent1"/>
+          </a:effectRef>
+          <a:fontRef idx="minor">
+            <a:schemeClr val="lt1"/>
+          </a:fontRef>
+        </p:style>
+        <p:txBody>
+          <a:bodyPr rtlCol="0" anchor="ctr"/>
+          <a:lstStyle/>
+          <a:p>
+            <a:pPr algn="ctr"/>
+          </a:p>
+        </p:txBody>
+      </p:sp>
+      <p:sp>
+        <p:nvSpPr>
+          <p:cNvPr id="3" name="Rectangle 2"/>
+          <p:cNvSpPr/>
+          <p:nvPr/>
+        </p:nvSpPr>
+        <p:spPr>
+          <a:xfrm>
+            <a:off x="0" y="0"/>
+            <a:ext cx="12188952" cy="50292"/>
+          </a:xfrm>
+          <a:prstGeom prst="rect">
+            <a:avLst/>
+          </a:prstGeom>
+          <a:solidFill>
+            <a:srgbClr val="1F2C56"/>
+          </a:solidFill>
+          <a:ln>
+            <a:noFill/>
+          </a:ln>
+        </p:spPr>
+        <p:style>
+          <a:lnRef idx="1">
+            <a:schemeClr val="accent1"/>
+          </a:lnRef>
+          <a:fillRef idx="3">
+            <a:schemeClr val="accent1"/>
+          </a:fillRef>
+          <a:effectRef idx="2">
+            <a:schemeClr val="accent1"/>
+          </a:effectRef>
+          <a:fontRef idx="minor">
+            <a:schemeClr val="lt1"/>
+          </a:fontRef>
+        </p:style>
+        <p:txBody>
+          <a:bodyPr rtlCol="0" anchor="ctr"/>
+          <a:lstStyle/>
+          <a:p>
+            <a:pPr algn="ctr"/>
+          </a:p>
+        </p:txBody>
+      </p:sp>
+      <p:sp>
+        <p:nvSpPr>
+          <p:cNvPr id="4" name="TextBox 3"/>
+          <p:cNvSpPr txBox="1"/>
+          <p:nvPr/>
+        </p:nvSpPr>
+        <p:spPr>
+          <a:xfrm>
+            <a:off x="685800" y="109728"/>
+            <a:ext cx="10817352" cy="228600"/>
+          </a:xfrm>
+          <a:prstGeom prst="rect">
+            <a:avLst/>
+          </a:prstGeom>
+          <a:noFill/>
+        </p:spPr>
+        <p:txBody>
+          <a:bodyPr wrap="none">
+            <a:spAutoFit/>
+          </a:bodyPr>
+          <a:lstStyle/>
+          <a:p>
+            <a:pPr algn="l"/>
+            <a:r>
+              <a:rPr sz="750">
+                <a:solidFill>
+                  <a:srgbClr val="78808C"/>
+                </a:solidFill>
+                <a:latin typeface="Consolas"/>
+              </a:rPr>
+              <a:t>TL03  ·  SCHAUBILD</a:t>
+            </a:r>
+          </a:p>
+        </p:txBody>
+      </p:sp>
+      <p:sp>
+        <p:nvSpPr>
+          <p:cNvPr id="5" name="TextBox 4"/>
+          <p:cNvSpPr txBox="1"/>
+          <p:nvPr/>
+        </p:nvSpPr>
+        <p:spPr>
+          <a:xfrm>
+            <a:off x="685800" y="502920"/>
+            <a:ext cx="10817352" cy="594360"/>
+          </a:xfrm>
+          <a:prstGeom prst="rect">
+            <a:avLst/>
+          </a:prstGeom>
+          <a:noFill/>
+        </p:spPr>
+        <p:txBody>
+          <a:bodyPr wrap="square">
+            <a:spAutoFit/>
+          </a:bodyPr>
+          <a:lstStyle/>
+          <a:p>
+            <a:pPr algn="l"/>
+            <a:r>
+              <a:rPr sz="2000" b="1" i="0">
+                <a:solidFill>
+                  <a:srgbClr val="1F2C56"/>
+                </a:solidFill>
+                <a:latin typeface="Arial"/>
+              </a:rPr>
+              <a:t>Teamphasenuhr: Teams können jederzeit zurückfallen</a:t>
+            </a:r>
+          </a:p>
+        </p:txBody>
+      </p:sp>
+      <p:sp>
+        <p:nvSpPr>
+          <p:cNvPr id="6" name="Rectangle 5"/>
+          <p:cNvSpPr/>
+          <p:nvPr/>
+        </p:nvSpPr>
+        <p:spPr>
+          <a:xfrm>
+            <a:off x="685800" y="1143000"/>
+            <a:ext cx="10817352" cy="25400"/>
+          </a:xfrm>
+          <a:prstGeom prst="rect">
+            <a:avLst/>
+          </a:prstGeom>
+          <a:solidFill>
+            <a:srgbClr val="D9C089"/>
+          </a:solidFill>
+          <a:ln>
+            <a:noFill/>
+          </a:ln>
+        </p:spPr>
+        <p:style>
+          <a:lnRef idx="1">
+            <a:schemeClr val="accent1"/>
+          </a:lnRef>
+          <a:fillRef idx="3">
+            <a:schemeClr val="accent1"/>
+          </a:fillRef>
+          <a:effectRef idx="2">
+            <a:schemeClr val="accent1"/>
+          </a:effectRef>
+          <a:fontRef idx="minor">
+            <a:schemeClr val="lt1"/>
+          </a:fontRef>
+        </p:style>
+        <p:txBody>
+          <a:bodyPr rtlCol="0" anchor="ctr"/>
+          <a:lstStyle/>
+          <a:p>
+            <a:pPr algn="ctr"/>
+          </a:p>
+        </p:txBody>
+      </p:sp>
+      <p:pic>
+        <p:nvPicPr>
+          <p:cNvPr id="7" name="Picture 6" descr="image.png"/>
+          <p:cNvPicPr>
+            <a:picLocks noChangeAspect="1"/>
+          </p:cNvPicPr>
+          <p:nvPr/>
+        </p:nvPicPr>
+        <p:blipFill>
+          <a:blip r:embed="rId2"/>
+          <a:stretch>
+            <a:fillRect/>
+          </a:stretch>
+        </p:blipFill>
+        <p:spPr>
+          <a:xfrm>
+            <a:off x="3060522" y="1325880"/>
+            <a:ext cx="6067907" cy="4937760"/>
+          </a:xfrm>
+          <a:prstGeom prst="rect">
+            <a:avLst/>
+          </a:prstGeom>
+        </p:spPr>
+      </p:pic>
+      <p:sp>
+        <p:nvSpPr>
+          <p:cNvPr id="8" name="Rectangle 7"/>
+          <p:cNvSpPr/>
+          <p:nvPr/>
+        </p:nvSpPr>
+        <p:spPr>
+          <a:xfrm>
+            <a:off x="0" y="6510528"/>
+            <a:ext cx="12188952" cy="347472"/>
+          </a:xfrm>
+          <a:prstGeom prst="rect">
+            <a:avLst/>
+          </a:prstGeom>
+          <a:solidFill>
+            <a:srgbClr val="0A1937"/>
+          </a:solidFill>
+          <a:ln>
+            <a:noFill/>
+          </a:ln>
+        </p:spPr>
+        <p:style>
+          <a:lnRef idx="1">
+            <a:schemeClr val="accent1"/>
+          </a:lnRef>
+          <a:fillRef idx="3">
+            <a:schemeClr val="accent1"/>
+          </a:fillRef>
+          <a:effectRef idx="2">
+            <a:schemeClr val="accent1"/>
+          </a:effectRef>
+          <a:fontRef idx="minor">
+            <a:schemeClr val="lt1"/>
+          </a:fontRef>
+        </p:style>
+        <p:txBody>
+          <a:bodyPr rtlCol="0" anchor="ctr"/>
+          <a:lstStyle/>
+          <a:p>
+            <a:pPr algn="ctr"/>
+          </a:p>
+        </p:txBody>
+      </p:sp>
+      <p:sp>
+        <p:nvSpPr>
+          <p:cNvPr id="9" name="TextBox 8"/>
+          <p:cNvSpPr txBox="1"/>
+          <p:nvPr/>
+        </p:nvSpPr>
+        <p:spPr>
+          <a:xfrm>
+            <a:off x="685800" y="6583680"/>
+            <a:ext cx="6490411" cy="256032"/>
+          </a:xfrm>
+          <a:prstGeom prst="rect">
+            <a:avLst/>
+          </a:prstGeom>
+          <a:noFill/>
+        </p:spPr>
+        <p:txBody>
+          <a:bodyPr wrap="none">
+            <a:spAutoFit/>
+          </a:bodyPr>
+          <a:lstStyle/>
+          <a:p>
+            <a:pPr algn="l"/>
+            <a:r>
+              <a:rPr sz="700">
+                <a:solidFill>
+                  <a:srgbClr val="A0B4D2"/>
+                </a:solidFill>
+                <a:latin typeface="Consolas"/>
+              </a:rPr>
+              <a:t>FKB Campus  ·  TL03</a:t>
+            </a:r>
+          </a:p>
+        </p:txBody>
+      </p:sp>
+      <p:sp>
+        <p:nvSpPr>
+          <p:cNvPr id="10" name="TextBox 9"/>
+          <p:cNvSpPr txBox="1"/>
+          <p:nvPr/>
+        </p:nvSpPr>
+        <p:spPr>
+          <a:xfrm>
+            <a:off x="7176211" y="6583680"/>
+            <a:ext cx="4326940" cy="256032"/>
+          </a:xfrm>
+          <a:prstGeom prst="rect">
+            <a:avLst/>
+          </a:prstGeom>
+          <a:noFill/>
+        </p:spPr>
+        <p:txBody>
+          <a:bodyPr wrap="none">
+            <a:spAutoFit/>
+          </a:bodyPr>
+          <a:lstStyle/>
+          <a:p>
+            <a:pPr algn="r"/>
+            <a:r>
+              <a:rPr sz="700">
+                <a:solidFill>
+                  <a:srgbClr val="A0B4D2"/>
+                </a:solidFill>
+                <a:latin typeface="Consolas"/>
+              </a:rPr>
+              <a:t>Schaubild</a:t>
+            </a:r>
+          </a:p>
+        </p:txBody>
+      </p:sp>
+    </p:spTree>
+  </p:cSld>
+  <p:clrMapOvr>
+    <a:masterClrMapping/>
+  </p:clrMapOvr>
+</p:sld>
+</file>
+
+<file path=ppt/slides/slide18.xml><?xml version="1.0" encoding="utf-8"?>
 <p:sld xmlns:a="http://schemas.openxmlformats.org/drawingml/2006/main" xmlns:p="http://schemas.openxmlformats.org/presentationml/2006/main" xmlns:r="http://schemas.openxmlformats.org/officeDocument/2006/relationships">
   <p:cSld>
     <p:spTree>
@@ -7918,765 +8387,6 @@
 </p:sld>
 </file>
 
-<file path=ppt/slides/slide17.xml><?xml version="1.0" encoding="utf-8"?>
-<p:sld xmlns:a="http://schemas.openxmlformats.org/drawingml/2006/main" xmlns:p="http://schemas.openxmlformats.org/presentationml/2006/main" xmlns:r="http://schemas.openxmlformats.org/officeDocument/2006/relationships">
-  <p:cSld>
-    <p:spTree>
-      <p:nvGrpSpPr>
-        <p:cNvPr id="1" name=""/>
-        <p:cNvGrpSpPr/>
-        <p:nvPr/>
-      </p:nvGrpSpPr>
-      <p:grpSpPr/>
-      <p:sp>
-        <p:nvSpPr>
-          <p:cNvPr id="2" name="Rectangle 1"/>
-          <p:cNvSpPr/>
-          <p:nvPr/>
-        </p:nvSpPr>
-        <p:spPr>
-          <a:xfrm>
-            <a:off x="0" y="0"/>
-            <a:ext cx="12188952" cy="6858000"/>
-          </a:xfrm>
-          <a:prstGeom prst="rect">
-            <a:avLst/>
-          </a:prstGeom>
-          <a:solidFill>
-            <a:srgbClr val="1F2C56"/>
-          </a:solidFill>
-          <a:ln>
-            <a:noFill/>
-          </a:ln>
-        </p:spPr>
-        <p:style>
-          <a:lnRef idx="1">
-            <a:schemeClr val="accent1"/>
-          </a:lnRef>
-          <a:fillRef idx="3">
-            <a:schemeClr val="accent1"/>
-          </a:fillRef>
-          <a:effectRef idx="2">
-            <a:schemeClr val="accent1"/>
-          </a:effectRef>
-          <a:fontRef idx="minor">
-            <a:schemeClr val="lt1"/>
-          </a:fontRef>
-        </p:style>
-        <p:txBody>
-          <a:bodyPr rtlCol="0" anchor="ctr"/>
-          <a:lstStyle/>
-          <a:p>
-            <a:pPr algn="ctr"/>
-          </a:p>
-        </p:txBody>
-      </p:sp>
-      <p:sp>
-        <p:nvSpPr>
-          <p:cNvPr id="3" name="TextBox 2"/>
-          <p:cNvSpPr txBox="1"/>
-          <p:nvPr/>
-        </p:nvSpPr>
-        <p:spPr>
-          <a:xfrm>
-            <a:off x="685800" y="2377440"/>
-            <a:ext cx="10817352" cy="365760"/>
-          </a:xfrm>
-          <a:prstGeom prst="rect">
-            <a:avLst/>
-          </a:prstGeom>
-          <a:noFill/>
-        </p:spPr>
-        <p:txBody>
-          <a:bodyPr wrap="none">
-            <a:spAutoFit/>
-          </a:bodyPr>
-          <a:lstStyle/>
-          <a:p>
-            <a:pPr algn="l"/>
-            <a:r>
-              <a:rPr sz="1200">
-                <a:solidFill>
-                  <a:srgbClr val="D9C089"/>
-                </a:solidFill>
-                <a:latin typeface="Consolas"/>
-              </a:rPr>
-              <a:t>EINZELARBEIT (15 MIN.)</a:t>
-            </a:r>
-          </a:p>
-        </p:txBody>
-      </p:sp>
-      <p:sp>
-        <p:nvSpPr>
-          <p:cNvPr id="4" name="Rectangle 3"/>
-          <p:cNvSpPr/>
-          <p:nvPr/>
-        </p:nvSpPr>
-        <p:spPr>
-          <a:xfrm>
-            <a:off x="685800" y="2788920"/>
-            <a:ext cx="548640" cy="38100"/>
-          </a:xfrm>
-          <a:prstGeom prst="rect">
-            <a:avLst/>
-          </a:prstGeom>
-          <a:solidFill>
-            <a:srgbClr val="D9C089"/>
-          </a:solidFill>
-          <a:ln>
-            <a:noFill/>
-          </a:ln>
-        </p:spPr>
-        <p:style>
-          <a:lnRef idx="1">
-            <a:schemeClr val="accent1"/>
-          </a:lnRef>
-          <a:fillRef idx="3">
-            <a:schemeClr val="accent1"/>
-          </a:fillRef>
-          <a:effectRef idx="2">
-            <a:schemeClr val="accent1"/>
-          </a:effectRef>
-          <a:fontRef idx="minor">
-            <a:schemeClr val="lt1"/>
-          </a:fontRef>
-        </p:style>
-        <p:txBody>
-          <a:bodyPr rtlCol="0" anchor="ctr"/>
-          <a:lstStyle/>
-          <a:p>
-            <a:pPr algn="ctr"/>
-          </a:p>
-        </p:txBody>
-      </p:sp>
-      <p:sp>
-        <p:nvSpPr>
-          <p:cNvPr id="5" name="TextBox 4"/>
-          <p:cNvSpPr txBox="1"/>
-          <p:nvPr/>
-        </p:nvSpPr>
-        <p:spPr>
-          <a:xfrm>
-            <a:off x="685800" y="3017520"/>
-            <a:ext cx="10817352" cy="1463040"/>
-          </a:xfrm>
-          <a:prstGeom prst="rect">
-            <a:avLst/>
-          </a:prstGeom>
-          <a:noFill/>
-        </p:spPr>
-        <p:txBody>
-          <a:bodyPr wrap="square">
-            <a:spAutoFit/>
-          </a:bodyPr>
-          <a:lstStyle/>
-          <a:p>
-            <a:pPr algn="l"/>
-            <a:r>
-              <a:rPr sz="4000" b="1" i="0">
-                <a:solidFill>
-                  <a:srgbClr val="FFFFFF"/>
-                </a:solidFill>
-                <a:latin typeface="Arial"/>
-              </a:rPr>
-              <a:t>AB-1: Team-Phasen-Diagnose</a:t>
-            </a:r>
-          </a:p>
-        </p:txBody>
-      </p:sp>
-      <p:sp>
-        <p:nvSpPr>
-          <p:cNvPr id="6" name="TextBox 5"/>
-          <p:cNvSpPr txBox="1"/>
-          <p:nvPr/>
-        </p:nvSpPr>
-        <p:spPr>
-          <a:xfrm>
-            <a:off x="685800" y="4480560"/>
-            <a:ext cx="8653881" cy="1280160"/>
-          </a:xfrm>
-          <a:prstGeom prst="rect">
-            <a:avLst/>
-          </a:prstGeom>
-          <a:noFill/>
-        </p:spPr>
-        <p:txBody>
-          <a:bodyPr wrap="square">
-            <a:spAutoFit/>
-          </a:bodyPr>
-          <a:lstStyle/>
-          <a:p>
-            <a:pPr algn="l"/>
-            <a:r>
-              <a:rPr sz="1600" b="0" i="0">
-                <a:solidFill>
-                  <a:srgbClr val="C8D2E6"/>
-                </a:solidFill>
-                <a:latin typeface="Arial"/>
-              </a:rPr>
-              <a:t>Aktuelle Phase des eigenen Teams bestimmen und Führungskonsequenz ableiten</a:t>
-            </a:r>
-          </a:p>
-        </p:txBody>
-      </p:sp>
-      <p:sp>
-        <p:nvSpPr>
-          <p:cNvPr id="7" name="TextBox 6"/>
-          <p:cNvSpPr txBox="1"/>
-          <p:nvPr/>
-        </p:nvSpPr>
-        <p:spPr>
-          <a:xfrm>
-            <a:off x="685800" y="6355080"/>
-            <a:ext cx="10817352" cy="274320"/>
-          </a:xfrm>
-          <a:prstGeom prst="rect">
-            <a:avLst/>
-          </a:prstGeom>
-          <a:noFill/>
-        </p:spPr>
-        <p:txBody>
-          <a:bodyPr wrap="none">
-            <a:spAutoFit/>
-          </a:bodyPr>
-          <a:lstStyle/>
-          <a:p>
-            <a:pPr algn="l"/>
-            <a:r>
-              <a:rPr sz="700">
-                <a:solidFill>
-                  <a:srgbClr val="8CA0C3"/>
-                </a:solidFill>
-                <a:latin typeface="Consolas"/>
-              </a:rPr>
-              <a:t>FKB Campus  ·  TL03</a:t>
-            </a:r>
-          </a:p>
-        </p:txBody>
-      </p:sp>
-    </p:spTree>
-  </p:cSld>
-  <p:clrMapOvr>
-    <a:masterClrMapping/>
-  </p:clrMapOvr>
-</p:sld>
-</file>
-
-<file path=ppt/slides/slide18.xml><?xml version="1.0" encoding="utf-8"?>
-<p:sld xmlns:a="http://schemas.openxmlformats.org/drawingml/2006/main" xmlns:p="http://schemas.openxmlformats.org/presentationml/2006/main" xmlns:r="http://schemas.openxmlformats.org/officeDocument/2006/relationships">
-  <p:cSld>
-    <p:spTree>
-      <p:nvGrpSpPr>
-        <p:cNvPr id="1" name=""/>
-        <p:cNvGrpSpPr/>
-        <p:nvPr/>
-      </p:nvGrpSpPr>
-      <p:grpSpPr/>
-      <p:sp>
-        <p:nvSpPr>
-          <p:cNvPr id="2" name="Rectangle 1"/>
-          <p:cNvSpPr/>
-          <p:nvPr/>
-        </p:nvSpPr>
-        <p:spPr>
-          <a:xfrm>
-            <a:off x="0" y="0"/>
-            <a:ext cx="12188952" cy="6858000"/>
-          </a:xfrm>
-          <a:prstGeom prst="rect">
-            <a:avLst/>
-          </a:prstGeom>
-          <a:solidFill>
-            <a:srgbClr val="EDEDF3"/>
-          </a:solidFill>
-          <a:ln>
-            <a:noFill/>
-          </a:ln>
-        </p:spPr>
-        <p:style>
-          <a:lnRef idx="1">
-            <a:schemeClr val="accent1"/>
-          </a:lnRef>
-          <a:fillRef idx="3">
-            <a:schemeClr val="accent1"/>
-          </a:fillRef>
-          <a:effectRef idx="2">
-            <a:schemeClr val="accent1"/>
-          </a:effectRef>
-          <a:fontRef idx="minor">
-            <a:schemeClr val="lt1"/>
-          </a:fontRef>
-        </p:style>
-        <p:txBody>
-          <a:bodyPr rtlCol="0" anchor="ctr"/>
-          <a:lstStyle/>
-          <a:p>
-            <a:pPr algn="ctr"/>
-          </a:p>
-        </p:txBody>
-      </p:sp>
-      <p:sp>
-        <p:nvSpPr>
-          <p:cNvPr id="3" name="Rectangle 2"/>
-          <p:cNvSpPr/>
-          <p:nvPr/>
-        </p:nvSpPr>
-        <p:spPr>
-          <a:xfrm>
-            <a:off x="0" y="0"/>
-            <a:ext cx="12188952" cy="50292"/>
-          </a:xfrm>
-          <a:prstGeom prst="rect">
-            <a:avLst/>
-          </a:prstGeom>
-          <a:solidFill>
-            <a:srgbClr val="1F2C56"/>
-          </a:solidFill>
-          <a:ln>
-            <a:noFill/>
-          </a:ln>
-        </p:spPr>
-        <p:style>
-          <a:lnRef idx="1">
-            <a:schemeClr val="accent1"/>
-          </a:lnRef>
-          <a:fillRef idx="3">
-            <a:schemeClr val="accent1"/>
-          </a:fillRef>
-          <a:effectRef idx="2">
-            <a:schemeClr val="accent1"/>
-          </a:effectRef>
-          <a:fontRef idx="minor">
-            <a:schemeClr val="lt1"/>
-          </a:fontRef>
-        </p:style>
-        <p:txBody>
-          <a:bodyPr rtlCol="0" anchor="ctr"/>
-          <a:lstStyle/>
-          <a:p>
-            <a:pPr algn="ctr"/>
-          </a:p>
-        </p:txBody>
-      </p:sp>
-      <p:sp>
-        <p:nvSpPr>
-          <p:cNvPr id="4" name="TextBox 3"/>
-          <p:cNvSpPr txBox="1"/>
-          <p:nvPr/>
-        </p:nvSpPr>
-        <p:spPr>
-          <a:xfrm>
-            <a:off x="685800" y="109728"/>
-            <a:ext cx="10817352" cy="228600"/>
-          </a:xfrm>
-          <a:prstGeom prst="rect">
-            <a:avLst/>
-          </a:prstGeom>
-          <a:noFill/>
-        </p:spPr>
-        <p:txBody>
-          <a:bodyPr wrap="none">
-            <a:spAutoFit/>
-          </a:bodyPr>
-          <a:lstStyle/>
-          <a:p>
-            <a:pPr algn="l"/>
-            <a:r>
-              <a:rPr sz="750">
-                <a:solidFill>
-                  <a:srgbClr val="78808C"/>
-                </a:solidFill>
-                <a:latin typeface="Consolas"/>
-              </a:rPr>
-              <a:t>TL03  ·  ARBEITSBLATT</a:t>
-            </a:r>
-          </a:p>
-        </p:txBody>
-      </p:sp>
-      <p:sp>
-        <p:nvSpPr>
-          <p:cNvPr id="5" name="Rectangle 4"/>
-          <p:cNvSpPr/>
-          <p:nvPr/>
-        </p:nvSpPr>
-        <p:spPr>
-          <a:xfrm>
-            <a:off x="0" y="1234440"/>
-            <a:ext cx="12188952" cy="12700"/>
-          </a:xfrm>
-          <a:prstGeom prst="rect">
-            <a:avLst/>
-          </a:prstGeom>
-          <a:solidFill>
-            <a:srgbClr val="D8DFE4"/>
-          </a:solidFill>
-          <a:ln>
-            <a:noFill/>
-          </a:ln>
-        </p:spPr>
-        <p:style>
-          <a:lnRef idx="1">
-            <a:schemeClr val="accent1"/>
-          </a:lnRef>
-          <a:fillRef idx="3">
-            <a:schemeClr val="accent1"/>
-          </a:fillRef>
-          <a:effectRef idx="2">
-            <a:schemeClr val="accent1"/>
-          </a:effectRef>
-          <a:fontRef idx="minor">
-            <a:schemeClr val="lt1"/>
-          </a:fontRef>
-        </p:style>
-        <p:txBody>
-          <a:bodyPr rtlCol="0" anchor="ctr"/>
-          <a:lstStyle/>
-          <a:p>
-            <a:pPr algn="ctr"/>
-          </a:p>
-        </p:txBody>
-      </p:sp>
-      <p:sp>
-        <p:nvSpPr>
-          <p:cNvPr id="6" name="Rectangle 5"/>
-          <p:cNvSpPr/>
-          <p:nvPr/>
-        </p:nvSpPr>
-        <p:spPr>
-          <a:xfrm>
-            <a:off x="685800" y="502920"/>
-            <a:ext cx="36576" cy="658368"/>
-          </a:xfrm>
-          <a:prstGeom prst="rect">
-            <a:avLst/>
-          </a:prstGeom>
-          <a:solidFill>
-            <a:srgbClr val="D9C089"/>
-          </a:solidFill>
-          <a:ln>
-            <a:noFill/>
-          </a:ln>
-        </p:spPr>
-        <p:style>
-          <a:lnRef idx="1">
-            <a:schemeClr val="accent1"/>
-          </a:lnRef>
-          <a:fillRef idx="3">
-            <a:schemeClr val="accent1"/>
-          </a:fillRef>
-          <a:effectRef idx="2">
-            <a:schemeClr val="accent1"/>
-          </a:effectRef>
-          <a:fontRef idx="minor">
-            <a:schemeClr val="lt1"/>
-          </a:fontRef>
-        </p:style>
-        <p:txBody>
-          <a:bodyPr rtlCol="0" anchor="ctr"/>
-          <a:lstStyle/>
-          <a:p>
-            <a:pPr algn="ctr"/>
-          </a:p>
-        </p:txBody>
-      </p:sp>
-      <p:sp>
-        <p:nvSpPr>
-          <p:cNvPr id="7" name="TextBox 6"/>
-          <p:cNvSpPr txBox="1"/>
-          <p:nvPr/>
-        </p:nvSpPr>
-        <p:spPr>
-          <a:xfrm>
-            <a:off x="813816" y="502920"/>
-            <a:ext cx="10634472" cy="685800"/>
-          </a:xfrm>
-          <a:prstGeom prst="rect">
-            <a:avLst/>
-          </a:prstGeom>
-          <a:noFill/>
-        </p:spPr>
-        <p:txBody>
-          <a:bodyPr wrap="square">
-            <a:spAutoFit/>
-          </a:bodyPr>
-          <a:lstStyle/>
-          <a:p>
-            <a:pPr algn="l"/>
-            <a:r>
-              <a:rPr sz="2400" b="1" i="0">
-                <a:solidFill>
-                  <a:srgbClr val="1F2C56"/>
-                </a:solidFill>
-                <a:latin typeface="Arial"/>
-              </a:rPr>
-              <a:t>AB-1: Mein Team – Phasendiagnose und nächste Führungshandlung</a:t>
-            </a:r>
-          </a:p>
-        </p:txBody>
-      </p:sp>
-      <p:sp>
-        <p:nvSpPr>
-          <p:cNvPr id="8" name="TextBox 7"/>
-          <p:cNvSpPr txBox="1"/>
-          <p:nvPr/>
-        </p:nvSpPr>
-        <p:spPr>
-          <a:xfrm>
-            <a:off x="685800" y="1554480"/>
-            <a:ext cx="10817352" cy="3840480"/>
-          </a:xfrm>
-          <a:prstGeom prst="rect">
-            <a:avLst/>
-          </a:prstGeom>
-          <a:noFill/>
-        </p:spPr>
-        <p:txBody>
-          <a:bodyPr wrap="square">
-            <a:spAutoFit/>
-          </a:bodyPr>
-          <a:lstStyle/>
-          <a:p>
-            <a:pPr marL="190500" indent="-190500">
-              <a:spcBef>
-                <a:spcPts val="400"/>
-              </a:spcBef>
-              <a:spcAft>
-                <a:spcPts val="200"/>
-              </a:spcAft>
-            </a:pPr>
-            <a:r>
-              <a:rPr sz="1400">
-                <a:solidFill>
-                  <a:srgbClr val="3D5466"/>
-                </a:solidFill>
-                <a:latin typeface="Arial"/>
-              </a:rPr>
-              <a:t>▸  Schritt 1: Drei Verhaltensbeobachtungen aus den letzten vier Wochen.</a:t>
-            </a:r>
-          </a:p>
-          <a:p>
-            <a:pPr marL="190500" indent="-190500">
-              <a:spcBef>
-                <a:spcPts val="400"/>
-              </a:spcBef>
-              <a:spcAft>
-                <a:spcPts val="200"/>
-              </a:spcAft>
-            </a:pPr>
-            <a:r>
-              <a:rPr sz="1400">
-                <a:solidFill>
-                  <a:srgbClr val="3D5466"/>
-                </a:solidFill>
-                <a:latin typeface="Arial"/>
-              </a:rPr>
-              <a:t>▸  Schritt 2: Tuckman-Phase begründet zuordnen.</a:t>
-            </a:r>
-          </a:p>
-          <a:p>
-            <a:pPr marL="190500" indent="-190500">
-              <a:spcBef>
-                <a:spcPts val="400"/>
-              </a:spcBef>
-              <a:spcAft>
-                <a:spcPts val="200"/>
-              </a:spcAft>
-            </a:pPr>
-            <a:r>
-              <a:rPr sz="1400">
-                <a:solidFill>
-                  <a:srgbClr val="3D5466"/>
-                </a:solidFill>
-                <a:latin typeface="Arial"/>
-              </a:rPr>
-              <a:t>▸  Schritt 3: Was verlangt die Phase – und was tue ich, das nicht passt?</a:t>
-            </a:r>
-          </a:p>
-          <a:p>
-            <a:pPr marL="190500" indent="-190500">
-              <a:spcBef>
-                <a:spcPts val="400"/>
-              </a:spcBef>
-              <a:spcAft>
-                <a:spcPts val="200"/>
-              </a:spcAft>
-            </a:pPr>
-            <a:r>
-              <a:rPr sz="1400">
-                <a:solidFill>
-                  <a:srgbClr val="3D5466"/>
-                </a:solidFill>
-                <a:latin typeface="Arial"/>
-              </a:rPr>
-              <a:t>▸  Schritt 4: Nächste konkrete Maßnahme mit Termin.</a:t>
-            </a:r>
-          </a:p>
-        </p:txBody>
-      </p:sp>
-      <p:sp>
-        <p:nvSpPr>
-          <p:cNvPr id="9" name="Rectangle 8"/>
-          <p:cNvSpPr/>
-          <p:nvPr/>
-        </p:nvSpPr>
-        <p:spPr>
-          <a:xfrm>
-            <a:off x="685800" y="5486400"/>
-            <a:ext cx="10817352" cy="640080"/>
-          </a:xfrm>
-          <a:prstGeom prst="rect">
-            <a:avLst/>
-          </a:prstGeom>
-          <a:solidFill>
-            <a:srgbClr val="1F2C56"/>
-          </a:solidFill>
-          <a:ln>
-            <a:noFill/>
-          </a:ln>
-        </p:spPr>
-        <p:style>
-          <a:lnRef idx="1">
-            <a:schemeClr val="accent1"/>
-          </a:lnRef>
-          <a:fillRef idx="3">
-            <a:schemeClr val="accent1"/>
-          </a:fillRef>
-          <a:effectRef idx="2">
-            <a:schemeClr val="accent1"/>
-          </a:effectRef>
-          <a:fontRef idx="minor">
-            <a:schemeClr val="lt1"/>
-          </a:fontRef>
-        </p:style>
-        <p:txBody>
-          <a:bodyPr rtlCol="0" anchor="ctr"/>
-          <a:lstStyle/>
-          <a:p>
-            <a:pPr algn="ctr"/>
-          </a:p>
-        </p:txBody>
-      </p:sp>
-      <p:sp>
-        <p:nvSpPr>
-          <p:cNvPr id="10" name="TextBox 9"/>
-          <p:cNvSpPr txBox="1"/>
-          <p:nvPr/>
-        </p:nvSpPr>
-        <p:spPr>
-          <a:xfrm>
-            <a:off x="868680" y="5596128"/>
-            <a:ext cx="10451592" cy="457200"/>
-          </a:xfrm>
-          <a:prstGeom prst="rect">
-            <a:avLst/>
-          </a:prstGeom>
-          <a:noFill/>
-        </p:spPr>
-        <p:txBody>
-          <a:bodyPr wrap="square">
-            <a:spAutoFit/>
-          </a:bodyPr>
-          <a:lstStyle/>
-          <a:p>
-            <a:pPr algn="l"/>
-            <a:r>
-              <a:rPr sz="1300" b="1" i="0">
-                <a:solidFill>
-                  <a:srgbClr val="FFFFFF"/>
-                </a:solidFill>
-                <a:latin typeface="Arial"/>
-              </a:rPr>
-              <a:t>→  Bearbeitung im Teilnehmer-Workbook (Arbeitsblatt mit Ausfüllfeldern)</a:t>
-            </a:r>
-          </a:p>
-        </p:txBody>
-      </p:sp>
-      <p:sp>
-        <p:nvSpPr>
-          <p:cNvPr id="11" name="Rectangle 10"/>
-          <p:cNvSpPr/>
-          <p:nvPr/>
-        </p:nvSpPr>
-        <p:spPr>
-          <a:xfrm>
-            <a:off x="0" y="6510528"/>
-            <a:ext cx="12188952" cy="347472"/>
-          </a:xfrm>
-          <a:prstGeom prst="rect">
-            <a:avLst/>
-          </a:prstGeom>
-          <a:solidFill>
-            <a:srgbClr val="0A1937"/>
-          </a:solidFill>
-          <a:ln>
-            <a:noFill/>
-          </a:ln>
-        </p:spPr>
-        <p:style>
-          <a:lnRef idx="1">
-            <a:schemeClr val="accent1"/>
-          </a:lnRef>
-          <a:fillRef idx="3">
-            <a:schemeClr val="accent1"/>
-          </a:fillRef>
-          <a:effectRef idx="2">
-            <a:schemeClr val="accent1"/>
-          </a:effectRef>
-          <a:fontRef idx="minor">
-            <a:schemeClr val="lt1"/>
-          </a:fontRef>
-        </p:style>
-        <p:txBody>
-          <a:bodyPr rtlCol="0" anchor="ctr"/>
-          <a:lstStyle/>
-          <a:p>
-            <a:pPr algn="ctr"/>
-          </a:p>
-        </p:txBody>
-      </p:sp>
-      <p:sp>
-        <p:nvSpPr>
-          <p:cNvPr id="12" name="TextBox 11"/>
-          <p:cNvSpPr txBox="1"/>
-          <p:nvPr/>
-        </p:nvSpPr>
-        <p:spPr>
-          <a:xfrm>
-            <a:off x="685800" y="6583680"/>
-            <a:ext cx="6490411" cy="256032"/>
-          </a:xfrm>
-          <a:prstGeom prst="rect">
-            <a:avLst/>
-          </a:prstGeom>
-          <a:noFill/>
-        </p:spPr>
-        <p:txBody>
-          <a:bodyPr wrap="none">
-            <a:spAutoFit/>
-          </a:bodyPr>
-          <a:lstStyle/>
-          <a:p>
-            <a:pPr algn="l"/>
-            <a:r>
-              <a:rPr sz="700">
-                <a:solidFill>
-                  <a:srgbClr val="A0B4D2"/>
-                </a:solidFill>
-                <a:latin typeface="Consolas"/>
-              </a:rPr>
-              <a:t>FKB Campus  ·  TL03</a:t>
-            </a:r>
-          </a:p>
-        </p:txBody>
-      </p:sp>
-    </p:spTree>
-  </p:cSld>
-  <p:clrMapOvr>
-    <a:masterClrMapping/>
-  </p:clrMapOvr>
-</p:sld>
-</file>
-
 <file path=ppt/slides/slide19.xml><?xml version="1.0" encoding="utf-8"?>
 <p:sld xmlns:a="http://schemas.openxmlformats.org/drawingml/2006/main" xmlns:p="http://schemas.openxmlformats.org/presentationml/2006/main" xmlns:r="http://schemas.openxmlformats.org/officeDocument/2006/relationships">
   <p:cSld>
@@ -8760,7 +8470,7 @@
                 </a:solidFill>
                 <a:latin typeface="Consolas"/>
               </a:rPr>
-              <a:t>EINZELARBEIT + SPRACHCHECK (35 MIN.)</a:t>
+              <a:t>EINZELARBEIT (15 MIN.)</a:t>
             </a:r>
           </a:p>
         </p:txBody>
@@ -8838,7 +8548,7 @@
                 </a:solidFill>
                 <a:latin typeface="Arial"/>
               </a:rPr>
-              <a:t>AB-2: Delegationsgespräch vorbereiten</a:t>
+              <a:t>AB-1: Team-Phasen-Diagnose</a:t>
             </a:r>
           </a:p>
         </p:txBody>
@@ -8873,7 +8583,7 @@
                 </a:solidFill>
                 <a:latin typeface="Arial"/>
               </a:rPr>
-              <a:t>Aufgabe, Entscheidungsspielraum und Entwicklungsabsicht klar und einladend formulieren</a:t>
+              <a:t>Aktuelle Phase des eigenen Teams bestimmen und Führungskonsequenz ableiten</a:t>
             </a:r>
           </a:p>
         </p:txBody>
@@ -9534,7 +9244,7 @@
                 </a:solidFill>
                 <a:latin typeface="Arial"/>
               </a:rPr>
-              <a:t>AB-2: Nicht „Hier ist die Aufgabe“ – sondern „Ich gebe Ihnen das, weil ich Ihnen vertraue“</a:t>
+              <a:t>AB-1: Mein Team – Phasendiagnose und nächste Führungshandlung</a:t>
             </a:r>
           </a:p>
         </p:txBody>
@@ -9576,7 +9286,7 @@
                 </a:solidFill>
                 <a:latin typeface="Arial"/>
               </a:rPr>
-              <a:t>▸  Schritt 1: Reifegrad-Einschätzung (D1–D4) für diese Person.</a:t>
+              <a:t>▸  Schritt 1: Drei Verhaltensbeobachtungen aus den letzten vier Wochen.</a:t>
             </a:r>
           </a:p>
           <a:p>
@@ -9595,7 +9305,7 @@
                 </a:solidFill>
                 <a:latin typeface="Arial"/>
               </a:rPr>
-              <a:t>▸  Schritt 2: Delegationsgrad (1–4) und Begründung.</a:t>
+              <a:t>▸  Schritt 2: Tuckman-Phase begründet zuordnen.</a:t>
             </a:r>
           </a:p>
           <a:p>
@@ -9614,7 +9324,7 @@
                 </a:solidFill>
                 <a:latin typeface="Arial"/>
               </a:rPr>
-              <a:t>▸  Schritt 3: Gesprächsstruktur – Kontext, Aufgabe, Spielraum, Entwicklungsabsicht.</a:t>
+              <a:t>▸  Schritt 3: Was verlangt die Phase – und was tue ich, das nicht passt?</a:t>
             </a:r>
           </a:p>
           <a:p>
@@ -9633,7 +9343,7 @@
                 </a:solidFill>
                 <a:latin typeface="Arial"/>
               </a:rPr>
-              <a:t>▸  Schritt 4: Antizipierte Reaktion und eigene Antwort darauf.</a:t>
+              <a:t>▸  Schritt 4: Nächste konkrete Maßnahme mit Termin.</a:t>
             </a:r>
           </a:p>
         </p:txBody>
@@ -9885,7 +9595,7 @@
                 </a:solidFill>
                 <a:latin typeface="Consolas"/>
               </a:rPr>
-              <a:t>ABSCHLUSS</a:t>
+              <a:t>EINZELARBEIT + SPRACHCHECK (35 MIN.)</a:t>
             </a:r>
           </a:p>
         </p:txBody>
@@ -9963,7 +9673,7 @@
                 </a:solidFill>
                 <a:latin typeface="Arial"/>
               </a:rPr>
-              <a:t>Transfer &amp; Haltung</a:t>
+              <a:t>AB-2: Delegationsgespräch vorbereiten</a:t>
             </a:r>
           </a:p>
         </p:txBody>
@@ -9998,7 +9708,7 @@
                 </a:solidFill>
                 <a:latin typeface="Arial"/>
               </a:rPr>
-              <a:t>Drei Transferaufgaben + Servant-Leadership als Alltagsprüfstein</a:t>
+              <a:t>Aufgabe, Entscheidungsspielraum und Entwicklungsabsicht klar und einladend formulieren</a:t>
             </a:r>
           </a:p>
         </p:txBody>
@@ -10172,7 +9882,7 @@
                 </a:solidFill>
                 <a:latin typeface="Consolas"/>
               </a:rPr>
-              <a:t>TL03  ·  INHALT</a:t>
+              <a:t>TL03  ·  ARBEITSBLATT</a:t>
             </a:r>
           </a:p>
         </p:txBody>
@@ -10293,7 +10003,7 @@
                 </a:solidFill>
                 <a:latin typeface="Arial"/>
               </a:rPr>
-              <a:t>Drei Transferaufgaben für die nächsten vier Wochen</a:t>
+              <a:t>AB-2: Nicht „Hier ist die Aufgabe“ – sondern „Ich gebe Ihnen das, weil ich Ihnen vertraue“</a:t>
             </a:r>
           </a:p>
         </p:txBody>
@@ -10306,8 +10016,8 @@
         </p:nvSpPr>
         <p:spPr>
           <a:xfrm>
-            <a:off x="685800" y="1417320"/>
-            <a:ext cx="10817352" cy="4892040"/>
+            <a:off x="685800" y="1554480"/>
+            <a:ext cx="10817352" cy="3840480"/>
           </a:xfrm>
           <a:prstGeom prst="rect">
             <a:avLst/>
@@ -10315,7 +10025,7 @@
           <a:noFill/>
         </p:spPr>
         <p:txBody>
-          <a:bodyPr wrap="square" anchor="ctr">
+          <a:bodyPr wrap="square">
             <a:spAutoFit/>
           </a:bodyPr>
           <a:lstStyle/>
@@ -10329,13 +10039,13 @@
               </a:spcAft>
             </a:pPr>
             <a:r>
-              <a:rPr sz="1300">
+              <a:rPr sz="1400">
                 <a:solidFill>
                   <a:srgbClr val="3D5466"/>
                 </a:solidFill>
                 <a:latin typeface="Arial"/>
               </a:rPr>
-              <a:t>▸  Woche 2: Delegation auf Grad 3/4 – explizites Gespräch, nicht Abgabe</a:t>
+              <a:t>▸  Schritt 1: Reifegrad-Einschätzung (D1–D4) für diese Person.</a:t>
             </a:r>
           </a:p>
           <a:p>
@@ -10348,13 +10058,13 @@
               </a:spcAft>
             </a:pPr>
             <a:r>
-              <a:rPr sz="1300">
+              <a:rPr sz="1400">
                 <a:solidFill>
                   <a:srgbClr val="3D5466"/>
                 </a:solidFill>
                 <a:latin typeface="Arial"/>
               </a:rPr>
-              <a:t>▸  Woche 3: SDT-Analyse in einem regulären Einzelgespräch</a:t>
+              <a:t>▸  Schritt 2: Delegationsgrad (1–4) und Begründung.</a:t>
             </a:r>
           </a:p>
           <a:p>
@@ -10367,13 +10077,32 @@
               </a:spcAft>
             </a:pPr>
             <a:r>
-              <a:rPr sz="1300">
+              <a:rPr sz="1400">
                 <a:solidFill>
                   <a:srgbClr val="3D5466"/>
                 </a:solidFill>
                 <a:latin typeface="Arial"/>
               </a:rPr>
-              <a:t>▸  Woche 4: Team-Meeting durch die Phasenbrille beobachten</a:t>
+              <a:t>▸  Schritt 3: Gesprächsstruktur – Kontext, Aufgabe, Spielraum, Entwicklungsabsicht.</a:t>
+            </a:r>
+          </a:p>
+          <a:p>
+            <a:pPr marL="190500" indent="-190500">
+              <a:spcBef>
+                <a:spcPts val="400"/>
+              </a:spcBef>
+              <a:spcAft>
+                <a:spcPts val="200"/>
+              </a:spcAft>
+            </a:pPr>
+            <a:r>
+              <a:rPr sz="1400">
+                <a:solidFill>
+                  <a:srgbClr val="3D5466"/>
+                </a:solidFill>
+                <a:latin typeface="Arial"/>
+              </a:rPr>
+              <a:t>▸  Schritt 4: Antizipierte Reaktion und eigene Antwort darauf.</a:t>
             </a:r>
           </a:p>
         </p:txBody>
@@ -10381,6 +10110,84 @@
       <p:sp>
         <p:nvSpPr>
           <p:cNvPr id="9" name="Rectangle 8"/>
+          <p:cNvSpPr/>
+          <p:nvPr/>
+        </p:nvSpPr>
+        <p:spPr>
+          <a:xfrm>
+            <a:off x="685800" y="5486400"/>
+            <a:ext cx="10817352" cy="640080"/>
+          </a:xfrm>
+          <a:prstGeom prst="rect">
+            <a:avLst/>
+          </a:prstGeom>
+          <a:solidFill>
+            <a:srgbClr val="1F2C56"/>
+          </a:solidFill>
+          <a:ln>
+            <a:noFill/>
+          </a:ln>
+        </p:spPr>
+        <p:style>
+          <a:lnRef idx="1">
+            <a:schemeClr val="accent1"/>
+          </a:lnRef>
+          <a:fillRef idx="3">
+            <a:schemeClr val="accent1"/>
+          </a:fillRef>
+          <a:effectRef idx="2">
+            <a:schemeClr val="accent1"/>
+          </a:effectRef>
+          <a:fontRef idx="minor">
+            <a:schemeClr val="lt1"/>
+          </a:fontRef>
+        </p:style>
+        <p:txBody>
+          <a:bodyPr rtlCol="0" anchor="ctr"/>
+          <a:lstStyle/>
+          <a:p>
+            <a:pPr algn="ctr"/>
+          </a:p>
+        </p:txBody>
+      </p:sp>
+      <p:sp>
+        <p:nvSpPr>
+          <p:cNvPr id="10" name="TextBox 9"/>
+          <p:cNvSpPr txBox="1"/>
+          <p:nvPr/>
+        </p:nvSpPr>
+        <p:spPr>
+          <a:xfrm>
+            <a:off x="868680" y="5596128"/>
+            <a:ext cx="10451592" cy="457200"/>
+          </a:xfrm>
+          <a:prstGeom prst="rect">
+            <a:avLst/>
+          </a:prstGeom>
+          <a:noFill/>
+        </p:spPr>
+        <p:txBody>
+          <a:bodyPr wrap="square">
+            <a:spAutoFit/>
+          </a:bodyPr>
+          <a:lstStyle/>
+          <a:p>
+            <a:pPr algn="l"/>
+            <a:r>
+              <a:rPr sz="1300" b="1" i="0">
+                <a:solidFill>
+                  <a:srgbClr val="FFFFFF"/>
+                </a:solidFill>
+                <a:latin typeface="Arial"/>
+              </a:rPr>
+              <a:t>→  Bearbeitung im Teilnehmer-Workbook (Arbeitsblatt mit Ausfüllfeldern)</a:t>
+            </a:r>
+          </a:p>
+        </p:txBody>
+      </p:sp>
+      <p:sp>
+        <p:nvSpPr>
+          <p:cNvPr id="11" name="Rectangle 10"/>
           <p:cNvSpPr/>
           <p:nvPr/>
         </p:nvSpPr>
@@ -10423,7 +10230,7 @@
       </p:sp>
       <p:sp>
         <p:nvSpPr>
-          <p:cNvPr id="10" name="TextBox 9"/>
+          <p:cNvPr id="12" name="TextBox 11"/>
           <p:cNvSpPr txBox="1"/>
           <p:nvPr/>
         </p:nvSpPr>
@@ -10489,6 +10296,668 @@
             <a:avLst/>
           </a:prstGeom>
           <a:solidFill>
+            <a:srgbClr val="1F2C56"/>
+          </a:solidFill>
+          <a:ln>
+            <a:noFill/>
+          </a:ln>
+        </p:spPr>
+        <p:style>
+          <a:lnRef idx="1">
+            <a:schemeClr val="accent1"/>
+          </a:lnRef>
+          <a:fillRef idx="3">
+            <a:schemeClr val="accent1"/>
+          </a:fillRef>
+          <a:effectRef idx="2">
+            <a:schemeClr val="accent1"/>
+          </a:effectRef>
+          <a:fontRef idx="minor">
+            <a:schemeClr val="lt1"/>
+          </a:fontRef>
+        </p:style>
+        <p:txBody>
+          <a:bodyPr rtlCol="0" anchor="ctr"/>
+          <a:lstStyle/>
+          <a:p>
+            <a:pPr algn="ctr"/>
+          </a:p>
+        </p:txBody>
+      </p:sp>
+      <p:sp>
+        <p:nvSpPr>
+          <p:cNvPr id="3" name="TextBox 2"/>
+          <p:cNvSpPr txBox="1"/>
+          <p:nvPr/>
+        </p:nvSpPr>
+        <p:spPr>
+          <a:xfrm>
+            <a:off x="685800" y="2377440"/>
+            <a:ext cx="10817352" cy="365760"/>
+          </a:xfrm>
+          <a:prstGeom prst="rect">
+            <a:avLst/>
+          </a:prstGeom>
+          <a:noFill/>
+        </p:spPr>
+        <p:txBody>
+          <a:bodyPr wrap="none">
+            <a:spAutoFit/>
+          </a:bodyPr>
+          <a:lstStyle/>
+          <a:p>
+            <a:pPr algn="l"/>
+            <a:r>
+              <a:rPr sz="1200">
+                <a:solidFill>
+                  <a:srgbClr val="D9C089"/>
+                </a:solidFill>
+                <a:latin typeface="Consolas"/>
+              </a:rPr>
+              <a:t>ABSCHLUSS</a:t>
+            </a:r>
+          </a:p>
+        </p:txBody>
+      </p:sp>
+      <p:sp>
+        <p:nvSpPr>
+          <p:cNvPr id="4" name="Rectangle 3"/>
+          <p:cNvSpPr/>
+          <p:nvPr/>
+        </p:nvSpPr>
+        <p:spPr>
+          <a:xfrm>
+            <a:off x="685800" y="2788920"/>
+            <a:ext cx="548640" cy="38100"/>
+          </a:xfrm>
+          <a:prstGeom prst="rect">
+            <a:avLst/>
+          </a:prstGeom>
+          <a:solidFill>
+            <a:srgbClr val="D9C089"/>
+          </a:solidFill>
+          <a:ln>
+            <a:noFill/>
+          </a:ln>
+        </p:spPr>
+        <p:style>
+          <a:lnRef idx="1">
+            <a:schemeClr val="accent1"/>
+          </a:lnRef>
+          <a:fillRef idx="3">
+            <a:schemeClr val="accent1"/>
+          </a:fillRef>
+          <a:effectRef idx="2">
+            <a:schemeClr val="accent1"/>
+          </a:effectRef>
+          <a:fontRef idx="minor">
+            <a:schemeClr val="lt1"/>
+          </a:fontRef>
+        </p:style>
+        <p:txBody>
+          <a:bodyPr rtlCol="0" anchor="ctr"/>
+          <a:lstStyle/>
+          <a:p>
+            <a:pPr algn="ctr"/>
+          </a:p>
+        </p:txBody>
+      </p:sp>
+      <p:sp>
+        <p:nvSpPr>
+          <p:cNvPr id="5" name="TextBox 4"/>
+          <p:cNvSpPr txBox="1"/>
+          <p:nvPr/>
+        </p:nvSpPr>
+        <p:spPr>
+          <a:xfrm>
+            <a:off x="685800" y="3017520"/>
+            <a:ext cx="10817352" cy="1463040"/>
+          </a:xfrm>
+          <a:prstGeom prst="rect">
+            <a:avLst/>
+          </a:prstGeom>
+          <a:noFill/>
+        </p:spPr>
+        <p:txBody>
+          <a:bodyPr wrap="square">
+            <a:spAutoFit/>
+          </a:bodyPr>
+          <a:lstStyle/>
+          <a:p>
+            <a:pPr algn="l"/>
+            <a:r>
+              <a:rPr sz="4000" b="1" i="0">
+                <a:solidFill>
+                  <a:srgbClr val="FFFFFF"/>
+                </a:solidFill>
+                <a:latin typeface="Arial"/>
+              </a:rPr>
+              <a:t>Transfer &amp; Haltung</a:t>
+            </a:r>
+          </a:p>
+        </p:txBody>
+      </p:sp>
+      <p:sp>
+        <p:nvSpPr>
+          <p:cNvPr id="6" name="TextBox 5"/>
+          <p:cNvSpPr txBox="1"/>
+          <p:nvPr/>
+        </p:nvSpPr>
+        <p:spPr>
+          <a:xfrm>
+            <a:off x="685800" y="4480560"/>
+            <a:ext cx="8653881" cy="1280160"/>
+          </a:xfrm>
+          <a:prstGeom prst="rect">
+            <a:avLst/>
+          </a:prstGeom>
+          <a:noFill/>
+        </p:spPr>
+        <p:txBody>
+          <a:bodyPr wrap="square">
+            <a:spAutoFit/>
+          </a:bodyPr>
+          <a:lstStyle/>
+          <a:p>
+            <a:pPr algn="l"/>
+            <a:r>
+              <a:rPr sz="1600" b="0" i="0">
+                <a:solidFill>
+                  <a:srgbClr val="C8D2E6"/>
+                </a:solidFill>
+                <a:latin typeface="Arial"/>
+              </a:rPr>
+              <a:t>Drei Transferaufgaben + Servant-Leadership als Alltagsprüfstein</a:t>
+            </a:r>
+          </a:p>
+        </p:txBody>
+      </p:sp>
+      <p:sp>
+        <p:nvSpPr>
+          <p:cNvPr id="7" name="TextBox 6"/>
+          <p:cNvSpPr txBox="1"/>
+          <p:nvPr/>
+        </p:nvSpPr>
+        <p:spPr>
+          <a:xfrm>
+            <a:off x="685800" y="6355080"/>
+            <a:ext cx="10817352" cy="274320"/>
+          </a:xfrm>
+          <a:prstGeom prst="rect">
+            <a:avLst/>
+          </a:prstGeom>
+          <a:noFill/>
+        </p:spPr>
+        <p:txBody>
+          <a:bodyPr wrap="none">
+            <a:spAutoFit/>
+          </a:bodyPr>
+          <a:lstStyle/>
+          <a:p>
+            <a:pPr algn="l"/>
+            <a:r>
+              <a:rPr sz="700">
+                <a:solidFill>
+                  <a:srgbClr val="8CA0C3"/>
+                </a:solidFill>
+                <a:latin typeface="Consolas"/>
+              </a:rPr>
+              <a:t>FKB Campus  ·  TL03</a:t>
+            </a:r>
+          </a:p>
+        </p:txBody>
+      </p:sp>
+    </p:spTree>
+  </p:cSld>
+  <p:clrMapOvr>
+    <a:masterClrMapping/>
+  </p:clrMapOvr>
+</p:sld>
+</file>
+
+<file path=ppt/slides/slide24.xml><?xml version="1.0" encoding="utf-8"?>
+<p:sld xmlns:a="http://schemas.openxmlformats.org/drawingml/2006/main" xmlns:p="http://schemas.openxmlformats.org/presentationml/2006/main" xmlns:r="http://schemas.openxmlformats.org/officeDocument/2006/relationships">
+  <p:cSld>
+    <p:spTree>
+      <p:nvGrpSpPr>
+        <p:cNvPr id="1" name=""/>
+        <p:cNvGrpSpPr/>
+        <p:nvPr/>
+      </p:nvGrpSpPr>
+      <p:grpSpPr/>
+      <p:sp>
+        <p:nvSpPr>
+          <p:cNvPr id="2" name="Rectangle 1"/>
+          <p:cNvSpPr/>
+          <p:nvPr/>
+        </p:nvSpPr>
+        <p:spPr>
+          <a:xfrm>
+            <a:off x="0" y="0"/>
+            <a:ext cx="12188952" cy="6858000"/>
+          </a:xfrm>
+          <a:prstGeom prst="rect">
+            <a:avLst/>
+          </a:prstGeom>
+          <a:solidFill>
+            <a:srgbClr val="EDEDF3"/>
+          </a:solidFill>
+          <a:ln>
+            <a:noFill/>
+          </a:ln>
+        </p:spPr>
+        <p:style>
+          <a:lnRef idx="1">
+            <a:schemeClr val="accent1"/>
+          </a:lnRef>
+          <a:fillRef idx="3">
+            <a:schemeClr val="accent1"/>
+          </a:fillRef>
+          <a:effectRef idx="2">
+            <a:schemeClr val="accent1"/>
+          </a:effectRef>
+          <a:fontRef idx="minor">
+            <a:schemeClr val="lt1"/>
+          </a:fontRef>
+        </p:style>
+        <p:txBody>
+          <a:bodyPr rtlCol="0" anchor="ctr"/>
+          <a:lstStyle/>
+          <a:p>
+            <a:pPr algn="ctr"/>
+          </a:p>
+        </p:txBody>
+      </p:sp>
+      <p:sp>
+        <p:nvSpPr>
+          <p:cNvPr id="3" name="Rectangle 2"/>
+          <p:cNvSpPr/>
+          <p:nvPr/>
+        </p:nvSpPr>
+        <p:spPr>
+          <a:xfrm>
+            <a:off x="0" y="0"/>
+            <a:ext cx="12188952" cy="50292"/>
+          </a:xfrm>
+          <a:prstGeom prst="rect">
+            <a:avLst/>
+          </a:prstGeom>
+          <a:solidFill>
+            <a:srgbClr val="1F2C56"/>
+          </a:solidFill>
+          <a:ln>
+            <a:noFill/>
+          </a:ln>
+        </p:spPr>
+        <p:style>
+          <a:lnRef idx="1">
+            <a:schemeClr val="accent1"/>
+          </a:lnRef>
+          <a:fillRef idx="3">
+            <a:schemeClr val="accent1"/>
+          </a:fillRef>
+          <a:effectRef idx="2">
+            <a:schemeClr val="accent1"/>
+          </a:effectRef>
+          <a:fontRef idx="minor">
+            <a:schemeClr val="lt1"/>
+          </a:fontRef>
+        </p:style>
+        <p:txBody>
+          <a:bodyPr rtlCol="0" anchor="ctr"/>
+          <a:lstStyle/>
+          <a:p>
+            <a:pPr algn="ctr"/>
+          </a:p>
+        </p:txBody>
+      </p:sp>
+      <p:sp>
+        <p:nvSpPr>
+          <p:cNvPr id="4" name="TextBox 3"/>
+          <p:cNvSpPr txBox="1"/>
+          <p:nvPr/>
+        </p:nvSpPr>
+        <p:spPr>
+          <a:xfrm>
+            <a:off x="685800" y="109728"/>
+            <a:ext cx="10817352" cy="228600"/>
+          </a:xfrm>
+          <a:prstGeom prst="rect">
+            <a:avLst/>
+          </a:prstGeom>
+          <a:noFill/>
+        </p:spPr>
+        <p:txBody>
+          <a:bodyPr wrap="none">
+            <a:spAutoFit/>
+          </a:bodyPr>
+          <a:lstStyle/>
+          <a:p>
+            <a:pPr algn="l"/>
+            <a:r>
+              <a:rPr sz="750">
+                <a:solidFill>
+                  <a:srgbClr val="78808C"/>
+                </a:solidFill>
+                <a:latin typeface="Consolas"/>
+              </a:rPr>
+              <a:t>TL03  ·  INHALT</a:t>
+            </a:r>
+          </a:p>
+        </p:txBody>
+      </p:sp>
+      <p:sp>
+        <p:nvSpPr>
+          <p:cNvPr id="5" name="Rectangle 4"/>
+          <p:cNvSpPr/>
+          <p:nvPr/>
+        </p:nvSpPr>
+        <p:spPr>
+          <a:xfrm>
+            <a:off x="0" y="1234440"/>
+            <a:ext cx="12188952" cy="12700"/>
+          </a:xfrm>
+          <a:prstGeom prst="rect">
+            <a:avLst/>
+          </a:prstGeom>
+          <a:solidFill>
+            <a:srgbClr val="D8DFE4"/>
+          </a:solidFill>
+          <a:ln>
+            <a:noFill/>
+          </a:ln>
+        </p:spPr>
+        <p:style>
+          <a:lnRef idx="1">
+            <a:schemeClr val="accent1"/>
+          </a:lnRef>
+          <a:fillRef idx="3">
+            <a:schemeClr val="accent1"/>
+          </a:fillRef>
+          <a:effectRef idx="2">
+            <a:schemeClr val="accent1"/>
+          </a:effectRef>
+          <a:fontRef idx="minor">
+            <a:schemeClr val="lt1"/>
+          </a:fontRef>
+        </p:style>
+        <p:txBody>
+          <a:bodyPr rtlCol="0" anchor="ctr"/>
+          <a:lstStyle/>
+          <a:p>
+            <a:pPr algn="ctr"/>
+          </a:p>
+        </p:txBody>
+      </p:sp>
+      <p:sp>
+        <p:nvSpPr>
+          <p:cNvPr id="6" name="Rectangle 5"/>
+          <p:cNvSpPr/>
+          <p:nvPr/>
+        </p:nvSpPr>
+        <p:spPr>
+          <a:xfrm>
+            <a:off x="685800" y="502920"/>
+            <a:ext cx="36576" cy="658368"/>
+          </a:xfrm>
+          <a:prstGeom prst="rect">
+            <a:avLst/>
+          </a:prstGeom>
+          <a:solidFill>
+            <a:srgbClr val="D9C089"/>
+          </a:solidFill>
+          <a:ln>
+            <a:noFill/>
+          </a:ln>
+        </p:spPr>
+        <p:style>
+          <a:lnRef idx="1">
+            <a:schemeClr val="accent1"/>
+          </a:lnRef>
+          <a:fillRef idx="3">
+            <a:schemeClr val="accent1"/>
+          </a:fillRef>
+          <a:effectRef idx="2">
+            <a:schemeClr val="accent1"/>
+          </a:effectRef>
+          <a:fontRef idx="minor">
+            <a:schemeClr val="lt1"/>
+          </a:fontRef>
+        </p:style>
+        <p:txBody>
+          <a:bodyPr rtlCol="0" anchor="ctr"/>
+          <a:lstStyle/>
+          <a:p>
+            <a:pPr algn="ctr"/>
+          </a:p>
+        </p:txBody>
+      </p:sp>
+      <p:sp>
+        <p:nvSpPr>
+          <p:cNvPr id="7" name="TextBox 6"/>
+          <p:cNvSpPr txBox="1"/>
+          <p:nvPr/>
+        </p:nvSpPr>
+        <p:spPr>
+          <a:xfrm>
+            <a:off x="813816" y="502920"/>
+            <a:ext cx="10634472" cy="685800"/>
+          </a:xfrm>
+          <a:prstGeom prst="rect">
+            <a:avLst/>
+          </a:prstGeom>
+          <a:noFill/>
+        </p:spPr>
+        <p:txBody>
+          <a:bodyPr wrap="square">
+            <a:spAutoFit/>
+          </a:bodyPr>
+          <a:lstStyle/>
+          <a:p>
+            <a:pPr algn="l"/>
+            <a:r>
+              <a:rPr sz="2400" b="1" i="0">
+                <a:solidFill>
+                  <a:srgbClr val="1F2C56"/>
+                </a:solidFill>
+                <a:latin typeface="Arial"/>
+              </a:rPr>
+              <a:t>Drei Transferaufgaben für die nächsten vier Wochen</a:t>
+            </a:r>
+          </a:p>
+        </p:txBody>
+      </p:sp>
+      <p:sp>
+        <p:nvSpPr>
+          <p:cNvPr id="8" name="TextBox 7"/>
+          <p:cNvSpPr txBox="1"/>
+          <p:nvPr/>
+        </p:nvSpPr>
+        <p:spPr>
+          <a:xfrm>
+            <a:off x="685800" y="1417320"/>
+            <a:ext cx="10817352" cy="4892040"/>
+          </a:xfrm>
+          <a:prstGeom prst="rect">
+            <a:avLst/>
+          </a:prstGeom>
+          <a:noFill/>
+        </p:spPr>
+        <p:txBody>
+          <a:bodyPr wrap="square" anchor="ctr">
+            <a:spAutoFit/>
+          </a:bodyPr>
+          <a:lstStyle/>
+          <a:p>
+            <a:pPr marL="190500" indent="-190500">
+              <a:spcBef>
+                <a:spcPts val="400"/>
+              </a:spcBef>
+              <a:spcAft>
+                <a:spcPts val="200"/>
+              </a:spcAft>
+            </a:pPr>
+            <a:r>
+              <a:rPr sz="1300">
+                <a:solidFill>
+                  <a:srgbClr val="3D5466"/>
+                </a:solidFill>
+                <a:latin typeface="Arial"/>
+              </a:rPr>
+              <a:t>▸  Woche 2: Delegation auf Grad 3/4 – explizites Gespräch, nicht Abgabe</a:t>
+            </a:r>
+          </a:p>
+          <a:p>
+            <a:pPr marL="190500" indent="-190500">
+              <a:spcBef>
+                <a:spcPts val="400"/>
+              </a:spcBef>
+              <a:spcAft>
+                <a:spcPts val="200"/>
+              </a:spcAft>
+            </a:pPr>
+            <a:r>
+              <a:rPr sz="1300">
+                <a:solidFill>
+                  <a:srgbClr val="3D5466"/>
+                </a:solidFill>
+                <a:latin typeface="Arial"/>
+              </a:rPr>
+              <a:t>▸  Woche 3: SDT-Analyse in einem regulären Einzelgespräch</a:t>
+            </a:r>
+          </a:p>
+          <a:p>
+            <a:pPr marL="190500" indent="-190500">
+              <a:spcBef>
+                <a:spcPts val="400"/>
+              </a:spcBef>
+              <a:spcAft>
+                <a:spcPts val="200"/>
+              </a:spcAft>
+            </a:pPr>
+            <a:r>
+              <a:rPr sz="1300">
+                <a:solidFill>
+                  <a:srgbClr val="3D5466"/>
+                </a:solidFill>
+                <a:latin typeface="Arial"/>
+              </a:rPr>
+              <a:t>▸  Woche 4: Team-Meeting durch die Phasenbrille beobachten</a:t>
+            </a:r>
+          </a:p>
+        </p:txBody>
+      </p:sp>
+      <p:sp>
+        <p:nvSpPr>
+          <p:cNvPr id="9" name="Rectangle 8"/>
+          <p:cNvSpPr/>
+          <p:nvPr/>
+        </p:nvSpPr>
+        <p:spPr>
+          <a:xfrm>
+            <a:off x="0" y="6510528"/>
+            <a:ext cx="12188952" cy="347472"/>
+          </a:xfrm>
+          <a:prstGeom prst="rect">
+            <a:avLst/>
+          </a:prstGeom>
+          <a:solidFill>
+            <a:srgbClr val="0A1937"/>
+          </a:solidFill>
+          <a:ln>
+            <a:noFill/>
+          </a:ln>
+        </p:spPr>
+        <p:style>
+          <a:lnRef idx="1">
+            <a:schemeClr val="accent1"/>
+          </a:lnRef>
+          <a:fillRef idx="3">
+            <a:schemeClr val="accent1"/>
+          </a:fillRef>
+          <a:effectRef idx="2">
+            <a:schemeClr val="accent1"/>
+          </a:effectRef>
+          <a:fontRef idx="minor">
+            <a:schemeClr val="lt1"/>
+          </a:fontRef>
+        </p:style>
+        <p:txBody>
+          <a:bodyPr rtlCol="0" anchor="ctr"/>
+          <a:lstStyle/>
+          <a:p>
+            <a:pPr algn="ctr"/>
+          </a:p>
+        </p:txBody>
+      </p:sp>
+      <p:sp>
+        <p:nvSpPr>
+          <p:cNvPr id="10" name="TextBox 9"/>
+          <p:cNvSpPr txBox="1"/>
+          <p:nvPr/>
+        </p:nvSpPr>
+        <p:spPr>
+          <a:xfrm>
+            <a:off x="685800" y="6583680"/>
+            <a:ext cx="6490411" cy="256032"/>
+          </a:xfrm>
+          <a:prstGeom prst="rect">
+            <a:avLst/>
+          </a:prstGeom>
+          <a:noFill/>
+        </p:spPr>
+        <p:txBody>
+          <a:bodyPr wrap="none">
+            <a:spAutoFit/>
+          </a:bodyPr>
+          <a:lstStyle/>
+          <a:p>
+            <a:pPr algn="l"/>
+            <a:r>
+              <a:rPr sz="700">
+                <a:solidFill>
+                  <a:srgbClr val="A0B4D2"/>
+                </a:solidFill>
+                <a:latin typeface="Consolas"/>
+              </a:rPr>
+              <a:t>FKB Campus  ·  TL03</a:t>
+            </a:r>
+          </a:p>
+        </p:txBody>
+      </p:sp>
+    </p:spTree>
+  </p:cSld>
+  <p:clrMapOvr>
+    <a:masterClrMapping/>
+  </p:clrMapOvr>
+</p:sld>
+</file>
+
+<file path=ppt/slides/slide25.xml><?xml version="1.0" encoding="utf-8"?>
+<p:sld xmlns:a="http://schemas.openxmlformats.org/drawingml/2006/main" xmlns:p="http://schemas.openxmlformats.org/presentationml/2006/main" xmlns:r="http://schemas.openxmlformats.org/officeDocument/2006/relationships">
+  <p:cSld>
+    <p:spTree>
+      <p:nvGrpSpPr>
+        <p:cNvPr id="1" name=""/>
+        <p:cNvGrpSpPr/>
+        <p:nvPr/>
+      </p:nvGrpSpPr>
+      <p:grpSpPr/>
+      <p:sp>
+        <p:nvSpPr>
+          <p:cNvPr id="2" name="Rectangle 1"/>
+          <p:cNvSpPr/>
+          <p:nvPr/>
+        </p:nvSpPr>
+        <p:spPr>
+          <a:xfrm>
+            <a:off x="0" y="0"/>
+            <a:ext cx="12188952" cy="6858000"/>
+          </a:xfrm>
+          <a:prstGeom prst="rect">
+            <a:avLst/>
+          </a:prstGeom>
+          <a:solidFill>
             <a:srgbClr val="EDEDF3"/>
           </a:solidFill>
           <a:ln>
@@ -12045,7 +12514,7 @@
             <a:avLst/>
           </a:prstGeom>
           <a:solidFill>
-            <a:srgbClr val="EDEDF3"/>
+            <a:srgbClr val="1F2C56"/>
           </a:solidFill>
           <a:ln>
             <a:noFill/>
@@ -12081,129 +12550,8 @@
         </p:nvSpPr>
         <p:spPr>
           <a:xfrm>
-            <a:off x="0" y="0"/>
-            <a:ext cx="12188952" cy="50292"/>
-          </a:xfrm>
-          <a:prstGeom prst="rect">
-            <a:avLst/>
-          </a:prstGeom>
-          <a:solidFill>
-            <a:srgbClr val="1F2C56"/>
-          </a:solidFill>
-          <a:ln>
-            <a:noFill/>
-          </a:ln>
-        </p:spPr>
-        <p:style>
-          <a:lnRef idx="1">
-            <a:schemeClr val="accent1"/>
-          </a:lnRef>
-          <a:fillRef idx="3">
-            <a:schemeClr val="accent1"/>
-          </a:fillRef>
-          <a:effectRef idx="2">
-            <a:schemeClr val="accent1"/>
-          </a:effectRef>
-          <a:fontRef idx="minor">
-            <a:schemeClr val="lt1"/>
-          </a:fontRef>
-        </p:style>
-        <p:txBody>
-          <a:bodyPr rtlCol="0" anchor="ctr"/>
-          <a:lstStyle/>
-          <a:p>
-            <a:pPr algn="ctr"/>
-          </a:p>
-        </p:txBody>
-      </p:sp>
-      <p:sp>
-        <p:nvSpPr>
-          <p:cNvPr id="4" name="TextBox 3"/>
-          <p:cNvSpPr txBox="1"/>
-          <p:nvPr/>
-        </p:nvSpPr>
-        <p:spPr>
-          <a:xfrm>
-            <a:off x="685800" y="109728"/>
-            <a:ext cx="10817352" cy="228600"/>
-          </a:xfrm>
-          <a:prstGeom prst="rect">
-            <a:avLst/>
-          </a:prstGeom>
-          <a:noFill/>
-        </p:spPr>
-        <p:txBody>
-          <a:bodyPr wrap="none">
-            <a:spAutoFit/>
-          </a:bodyPr>
-          <a:lstStyle/>
-          <a:p>
-            <a:pPr algn="l"/>
-            <a:r>
-              <a:rPr sz="750">
-                <a:solidFill>
-                  <a:srgbClr val="78808C"/>
-                </a:solidFill>
-                <a:latin typeface="Consolas"/>
-              </a:rPr>
-              <a:t>TL03  ·  INHALT</a:t>
-            </a:r>
-          </a:p>
-        </p:txBody>
-      </p:sp>
-      <p:sp>
-        <p:nvSpPr>
-          <p:cNvPr id="5" name="Rectangle 4"/>
-          <p:cNvSpPr/>
-          <p:nvPr/>
-        </p:nvSpPr>
-        <p:spPr>
-          <a:xfrm>
-            <a:off x="0" y="1234440"/>
-            <a:ext cx="12188952" cy="12700"/>
-          </a:xfrm>
-          <a:prstGeom prst="rect">
-            <a:avLst/>
-          </a:prstGeom>
-          <a:solidFill>
-            <a:srgbClr val="D8DFE4"/>
-          </a:solidFill>
-          <a:ln>
-            <a:noFill/>
-          </a:ln>
-        </p:spPr>
-        <p:style>
-          <a:lnRef idx="1">
-            <a:schemeClr val="accent1"/>
-          </a:lnRef>
-          <a:fillRef idx="3">
-            <a:schemeClr val="accent1"/>
-          </a:fillRef>
-          <a:effectRef idx="2">
-            <a:schemeClr val="accent1"/>
-          </a:effectRef>
-          <a:fontRef idx="minor">
-            <a:schemeClr val="lt1"/>
-          </a:fontRef>
-        </p:style>
-        <p:txBody>
-          <a:bodyPr rtlCol="0" anchor="ctr"/>
-          <a:lstStyle/>
-          <a:p>
-            <a:pPr algn="ctr"/>
-          </a:p>
-        </p:txBody>
-      </p:sp>
-      <p:sp>
-        <p:nvSpPr>
-          <p:cNvPr id="6" name="Rectangle 5"/>
-          <p:cNvSpPr/>
-          <p:nvPr/>
-        </p:nvSpPr>
-        <p:spPr>
-          <a:xfrm>
-            <a:off x="685800" y="502920"/>
-            <a:ext cx="36576" cy="658368"/>
+            <a:off x="685800" y="2788920"/>
+            <a:ext cx="548640" cy="38100"/>
           </a:xfrm>
           <a:prstGeom prst="rect">
             <a:avLst/>
@@ -12239,14 +12587,14 @@
       </p:sp>
       <p:sp>
         <p:nvSpPr>
-          <p:cNvPr id="7" name="TextBox 6"/>
+          <p:cNvPr id="4" name="TextBox 3"/>
           <p:cNvSpPr txBox="1"/>
           <p:nvPr/>
         </p:nvSpPr>
         <p:spPr>
           <a:xfrm>
-            <a:off x="813816" y="502920"/>
-            <a:ext cx="10634472" cy="685800"/>
+            <a:off x="685800" y="3017520"/>
+            <a:ext cx="10817352" cy="1463040"/>
           </a:xfrm>
           <a:prstGeom prst="rect">
             <a:avLst/>
@@ -12261,9 +12609,9 @@
           <a:p>
             <a:pPr algn="l"/>
             <a:r>
-              <a:rPr sz="2400" b="1" i="0">
-                <a:solidFill>
-                  <a:srgbClr val="1F2C56"/>
+              <a:rPr sz="4000" b="1" i="0">
+                <a:solidFill>
+                  <a:srgbClr val="FFFFFF"/>
                 </a:solidFill>
                 <a:latin typeface="Arial"/>
               </a:rPr>
@@ -12274,57 +12622,49 @@
       </p:sp>
       <p:sp>
         <p:nvSpPr>
-          <p:cNvPr id="8" name="Rectangle 7"/>
-          <p:cNvSpPr/>
-          <p:nvPr/>
-        </p:nvSpPr>
-        <p:spPr>
-          <a:xfrm>
-            <a:off x="0" y="6510528"/>
-            <a:ext cx="12188952" cy="347472"/>
-          </a:xfrm>
-          <a:prstGeom prst="rect">
-            <a:avLst/>
-          </a:prstGeom>
-          <a:solidFill>
-            <a:srgbClr val="0A1937"/>
-          </a:solidFill>
-          <a:ln>
-            <a:noFill/>
-          </a:ln>
-        </p:spPr>
-        <p:style>
-          <a:lnRef idx="1">
-            <a:schemeClr val="accent1"/>
-          </a:lnRef>
-          <a:fillRef idx="3">
-            <a:schemeClr val="accent1"/>
-          </a:fillRef>
-          <a:effectRef idx="2">
-            <a:schemeClr val="accent1"/>
-          </a:effectRef>
-          <a:fontRef idx="minor">
-            <a:schemeClr val="lt1"/>
-          </a:fontRef>
-        </p:style>
-        <p:txBody>
-          <a:bodyPr rtlCol="0" anchor="ctr"/>
-          <a:lstStyle/>
-          <a:p>
-            <a:pPr algn="ctr"/>
-          </a:p>
-        </p:txBody>
-      </p:sp>
-      <p:sp>
-        <p:nvSpPr>
-          <p:cNvPr id="9" name="TextBox 8"/>
+          <p:cNvPr id="5" name="TextBox 4"/>
           <p:cNvSpPr txBox="1"/>
           <p:nvPr/>
         </p:nvSpPr>
         <p:spPr>
           <a:xfrm>
-            <a:off x="685800" y="6583680"/>
-            <a:ext cx="6490411" cy="256032"/>
+            <a:off x="685800" y="4480560"/>
+            <a:ext cx="8653881" cy="1280160"/>
+          </a:xfrm>
+          <a:prstGeom prst="rect">
+            <a:avLst/>
+          </a:prstGeom>
+          <a:noFill/>
+        </p:spPr>
+        <p:txBody>
+          <a:bodyPr wrap="square">
+            <a:spAutoFit/>
+          </a:bodyPr>
+          <a:lstStyle/>
+          <a:p>
+            <a:pPr algn="l"/>
+            <a:r>
+              <a:rPr sz="1600" b="0" i="0">
+                <a:solidFill>
+                  <a:srgbClr val="C8D2E6"/>
+                </a:solidFill>
+                <a:latin typeface="Arial"/>
+              </a:rPr>
+              <a:t>Was übergebe ich an wen – und mit wie viel Entscheidungsspielraum?</a:t>
+            </a:r>
+          </a:p>
+        </p:txBody>
+      </p:sp>
+      <p:sp>
+        <p:nvSpPr>
+          <p:cNvPr id="6" name="TextBox 5"/>
+          <p:cNvSpPr txBox="1"/>
+          <p:nvPr/>
+        </p:nvSpPr>
+        <p:spPr>
+          <a:xfrm>
+            <a:off x="685800" y="6355080"/>
+            <a:ext cx="10817352" cy="274320"/>
           </a:xfrm>
           <a:prstGeom prst="rect">
             <a:avLst/>
@@ -12341,7 +12681,7 @@
             <a:r>
               <a:rPr sz="700">
                 <a:solidFill>
-                  <a:srgbClr val="A0B4D2"/>
+                  <a:srgbClr val="8CA0C3"/>
                 </a:solidFill>
                 <a:latin typeface="Consolas"/>
               </a:rPr>
@@ -13507,7 +13847,7 @@
                 </a:solidFill>
                 <a:latin typeface="Arial"/>
               </a:rPr>
-              <a:t>Der Affe wechselt den Rücken – wenn die Übergabe nicht klar ist</a:t>
+              <a:t>10-80-10: Die ersten zehn Prozent entscheiden über die anderen neunzig</a:t>
             </a:r>
           </a:p>
         </p:txBody>
@@ -13533,6 +13873,25 @@
             <a:spAutoFit/>
           </a:bodyPr>
           <a:lstStyle/>
+          <a:p>
+            <a:pPr marL="177800" indent="-177800">
+              <a:spcBef>
+                <a:spcPts val="600"/>
+              </a:spcBef>
+              <a:spcAft>
+                <a:spcPts val="200"/>
+              </a:spcAft>
+            </a:pPr>
+            <a:r>
+              <a:rPr sz="1200" i="1">
+                <a:solidFill>
+                  <a:srgbClr val="3D5466"/>
+                </a:solidFill>
+                <a:latin typeface="Arial"/>
+              </a:rPr>
+              <a:t>→  Die Delegationsgrade sagen, wie viel Spielraum ich übergebe. 10-80-10 sagt, wie ich begleite, ohne ins Mikromanagement zu fallen.</a:t>
+            </a:r>
+          </a:p>
           <a:p>
             <a:pPr marL="190500" indent="-190500">
               <a:spcBef>
@@ -13549,7 +13908,7 @@
                 </a:solidFill>
                 <a:latin typeface="Arial"/>
               </a:rPr>
-              <a:t>▸  Mitarbeitende/r schildert Problem, geht ohne Lösung</a:t>
+              <a:t>▸  Erste 10 % – Rahmen setzen: Zielbild, Warum, Termin, nicht verhandelbare Leitplanken</a:t>
             </a:r>
           </a:p>
           <a:p>
@@ -13568,7 +13927,7 @@
                 </a:solidFill>
                 <a:latin typeface="Arial"/>
               </a:rPr>
-              <a:t>▸  Führungskraft hat abends mehr auf dem Tisch als morgens</a:t>
+              <a:t>▸  Mittlere 80 % – loslassen: Ausführung liegt vollständig beim Mitarbeitenden (Grad 3–4)</a:t>
             </a:r>
           </a:p>
           <a:p>
@@ -13587,7 +13946,7 @@
                 </a:solidFill>
                 <a:latin typeface="Arial"/>
               </a:rPr>
-              <a:t>▸  Rückfrage-Regel: „Was haben Sie sich schon überlegt?“</a:t>
+              <a:t>▸  Letzte 10 % – veredeln: prüfen, Feinschliff geben, Qualität sichern, würdigen</a:t>
             </a:r>
           </a:p>
           <a:p>
@@ -13606,7 +13965,7 @@
                 </a:solidFill>
                 <a:latin typeface="Arial"/>
               </a:rPr>
-              <a:t>▸  Erst Lösungsansatz – dann Delegationsgrad bestimmen</a:t>
+              <a:t>▸  Die zwei häufigsten Fehler: die ersten 10 % überspringen – oder in den mittleren 80 % ständig eingreifen</a:t>
             </a:r>
           </a:p>
         </p:txBody>
@@ -13944,14 +14303,113 @@
                 </a:solidFill>
                 <a:latin typeface="Arial"/>
               </a:rPr>
-              <a:t>II · Motivation</a:t>
-            </a:r>
-          </a:p>
-        </p:txBody>
-      </p:sp>
-      <p:sp>
-        <p:nvSpPr>
-          <p:cNvPr id="8" name="Rectangle 7"/>
+              <a:t>Der Affe wechselt den Rücken – wenn die Übergabe nicht klar ist</a:t>
+            </a:r>
+          </a:p>
+        </p:txBody>
+      </p:sp>
+      <p:sp>
+        <p:nvSpPr>
+          <p:cNvPr id="8" name="TextBox 7"/>
+          <p:cNvSpPr txBox="1"/>
+          <p:nvPr/>
+        </p:nvSpPr>
+        <p:spPr>
+          <a:xfrm>
+            <a:off x="685800" y="1417320"/>
+            <a:ext cx="10817352" cy="4892040"/>
+          </a:xfrm>
+          <a:prstGeom prst="rect">
+            <a:avLst/>
+          </a:prstGeom>
+          <a:noFill/>
+        </p:spPr>
+        <p:txBody>
+          <a:bodyPr wrap="square" anchor="ctr">
+            <a:spAutoFit/>
+          </a:bodyPr>
+          <a:lstStyle/>
+          <a:p>
+            <a:pPr marL="190500" indent="-190500">
+              <a:spcBef>
+                <a:spcPts val="400"/>
+              </a:spcBef>
+              <a:spcAft>
+                <a:spcPts val="200"/>
+              </a:spcAft>
+            </a:pPr>
+            <a:r>
+              <a:rPr sz="1300">
+                <a:solidFill>
+                  <a:srgbClr val="3D5466"/>
+                </a:solidFill>
+                <a:latin typeface="Arial"/>
+              </a:rPr>
+              <a:t>▸  Mitarbeitende/r schildert Problem, geht ohne Lösung</a:t>
+            </a:r>
+          </a:p>
+          <a:p>
+            <a:pPr marL="190500" indent="-190500">
+              <a:spcBef>
+                <a:spcPts val="400"/>
+              </a:spcBef>
+              <a:spcAft>
+                <a:spcPts val="200"/>
+              </a:spcAft>
+            </a:pPr>
+            <a:r>
+              <a:rPr sz="1300">
+                <a:solidFill>
+                  <a:srgbClr val="3D5466"/>
+                </a:solidFill>
+                <a:latin typeface="Arial"/>
+              </a:rPr>
+              <a:t>▸  Führungskraft hat abends mehr auf dem Tisch als morgens</a:t>
+            </a:r>
+          </a:p>
+          <a:p>
+            <a:pPr marL="190500" indent="-190500">
+              <a:spcBef>
+                <a:spcPts val="400"/>
+              </a:spcBef>
+              <a:spcAft>
+                <a:spcPts val="200"/>
+              </a:spcAft>
+            </a:pPr>
+            <a:r>
+              <a:rPr sz="1300">
+                <a:solidFill>
+                  <a:srgbClr val="3D5466"/>
+                </a:solidFill>
+                <a:latin typeface="Arial"/>
+              </a:rPr>
+              <a:t>▸  Rückfrage-Regel: „Was haben Sie sich schon überlegt?“</a:t>
+            </a:r>
+          </a:p>
+          <a:p>
+            <a:pPr marL="190500" indent="-190500">
+              <a:spcBef>
+                <a:spcPts val="400"/>
+              </a:spcBef>
+              <a:spcAft>
+                <a:spcPts val="200"/>
+              </a:spcAft>
+            </a:pPr>
+            <a:r>
+              <a:rPr sz="1300">
+                <a:solidFill>
+                  <a:srgbClr val="3D5466"/>
+                </a:solidFill>
+                <a:latin typeface="Arial"/>
+              </a:rPr>
+              <a:t>▸  Erst Lösungsansatz – dann Delegationsgrad bestimmen</a:t>
+            </a:r>
+          </a:p>
+        </p:txBody>
+      </p:sp>
+      <p:sp>
+        <p:nvSpPr>
+          <p:cNvPr id="9" name="Rectangle 8"/>
           <p:cNvSpPr/>
           <p:nvPr/>
         </p:nvSpPr>
@@ -13994,7 +14452,7 @@
       </p:sp>
       <p:sp>
         <p:nvSpPr>
-          <p:cNvPr id="9" name="TextBox 8"/>
+          <p:cNvPr id="10" name="TextBox 9"/>
           <p:cNvSpPr txBox="1"/>
           <p:nvPr/>
         </p:nvSpPr>
